--- a/output_pptx/Arms_Open_Wide.pptx
+++ b/output_pptx/Arms_Open_Wide.pptx
@@ -3122,8 +3122,8 @@
         </p:nvSpPr>
         <p:spPr>
           <a:xfrm>
-            <a:off x="594360" y="2258568"/>
-            <a:ext cx="11002975" cy="685800"/>
+            <a:off x="640080" y="2052828"/>
+            <a:ext cx="10911535" cy="731520"/>
           </a:xfrm>
           <a:prstGeom prst="rect">
             <a:avLst/>
@@ -3138,7 +3138,7 @@
           <a:p>
             <a:pPr algn="ctr"/>
             <a:r>
-              <a:rPr sz="4400" b="1" i="0">
+              <a:rPr sz="4800" b="1" i="0">
                 <a:solidFill>
                   <a:srgbClr val="FFFFFF"/>
                 </a:solidFill>
@@ -3157,8 +3157,8 @@
         </p:nvSpPr>
         <p:spPr>
           <a:xfrm>
-            <a:off x="594360" y="2980944"/>
-            <a:ext cx="11002975" cy="347472"/>
+            <a:off x="640080" y="2985516"/>
+            <a:ext cx="10911535" cy="731520"/>
           </a:xfrm>
           <a:prstGeom prst="rect">
             <a:avLst/>
@@ -3173,83 +3173,13 @@
           <a:p>
             <a:pPr algn="ctr"/>
             <a:r>
-              <a:rPr sz="2200" b="0" i="1">
-                <a:solidFill>
-                  <a:srgbClr val="8C8C8C"/>
-                </a:solidFill>
-                <a:latin typeface="Arial"/>
-              </a:rPr>
-              <a:t/>
-            </a:r>
-          </a:p>
-        </p:txBody>
-      </p:sp>
-      <p:sp>
-        <p:nvSpPr>
-          <p:cNvPr id="4" name="TextBox 3"/>
-          <p:cNvSpPr txBox="1"/>
-          <p:nvPr/>
-        </p:nvSpPr>
-        <p:spPr>
-          <a:xfrm>
-            <a:off x="594360" y="3529584"/>
-            <a:ext cx="11002975" cy="685800"/>
-          </a:xfrm>
-          <a:prstGeom prst="rect">
-            <a:avLst/>
-          </a:prstGeom>
-          <a:noFill/>
-        </p:spPr>
-        <p:txBody>
-          <a:bodyPr wrap="square">
-            <a:spAutoFit/>
-          </a:bodyPr>
-          <a:lstStyle/>
-          <a:p>
-            <a:pPr algn="ctr"/>
-            <a:r>
-              <a:rPr sz="4400" b="1" i="0">
+              <a:rPr sz="4800" b="1" i="0">
                 <a:solidFill>
                   <a:srgbClr val="FFFFFF"/>
                 </a:solidFill>
                 <a:latin typeface="Arial"/>
               </a:rPr>
               <a:t>Tome a minha vida, Eu te entrego</a:t>
-            </a:r>
-          </a:p>
-        </p:txBody>
-      </p:sp>
-      <p:sp>
-        <p:nvSpPr>
-          <p:cNvPr id="5" name="TextBox 4"/>
-          <p:cNvSpPr txBox="1"/>
-          <p:nvPr/>
-        </p:nvSpPr>
-        <p:spPr>
-          <a:xfrm>
-            <a:off x="594360" y="4251960"/>
-            <a:ext cx="11002975" cy="347472"/>
-          </a:xfrm>
-          <a:prstGeom prst="rect">
-            <a:avLst/>
-          </a:prstGeom>
-          <a:noFill/>
-        </p:spPr>
-        <p:txBody>
-          <a:bodyPr wrap="square">
-            <a:spAutoFit/>
-          </a:bodyPr>
-          <a:lstStyle/>
-          <a:p>
-            <a:pPr algn="ctr"/>
-            <a:r>
-              <a:rPr sz="2200" b="0" i="1">
-                <a:solidFill>
-                  <a:srgbClr val="8C8C8C"/>
-                </a:solidFill>
-                <a:latin typeface="Arial"/>
-              </a:rPr>
-              <a:t/>
             </a:r>
           </a:p>
         </p:txBody>
@@ -3288,8 +3218,8 @@
         </p:nvSpPr>
         <p:spPr>
           <a:xfrm>
-            <a:off x="594360" y="2258568"/>
-            <a:ext cx="11002975" cy="685800"/>
+            <a:off x="640080" y="2052828"/>
+            <a:ext cx="10911535" cy="731520"/>
           </a:xfrm>
           <a:prstGeom prst="rect">
             <a:avLst/>
@@ -3304,7 +3234,7 @@
           <a:p>
             <a:pPr algn="ctr"/>
             <a:r>
-              <a:rPr sz="4400" b="1" i="0">
+              <a:rPr sz="4800" b="1" i="0">
                 <a:solidFill>
                   <a:srgbClr val="FFFFFF"/>
                 </a:solidFill>
@@ -3323,8 +3253,8 @@
         </p:nvSpPr>
         <p:spPr>
           <a:xfrm>
-            <a:off x="594360" y="2980944"/>
-            <a:ext cx="11002975" cy="347472"/>
+            <a:off x="640080" y="2985516"/>
+            <a:ext cx="10911535" cy="731520"/>
           </a:xfrm>
           <a:prstGeom prst="rect">
             <a:avLst/>
@@ -3339,83 +3269,13 @@
           <a:p>
             <a:pPr algn="ctr"/>
             <a:r>
-              <a:rPr sz="2200" b="0" i="1">
-                <a:solidFill>
-                  <a:srgbClr val="8C8C8C"/>
-                </a:solidFill>
-                <a:latin typeface="Arial"/>
-              </a:rPr>
-              <a:t/>
-            </a:r>
-          </a:p>
-        </p:txBody>
-      </p:sp>
-      <p:sp>
-        <p:nvSpPr>
-          <p:cNvPr id="4" name="TextBox 3"/>
-          <p:cNvSpPr txBox="1"/>
-          <p:nvPr/>
-        </p:nvSpPr>
-        <p:spPr>
-          <a:xfrm>
-            <a:off x="594360" y="3529584"/>
-            <a:ext cx="11002975" cy="685800"/>
-          </a:xfrm>
-          <a:prstGeom prst="rect">
-            <a:avLst/>
-          </a:prstGeom>
-          <a:noFill/>
-        </p:spPr>
-        <p:txBody>
-          <a:bodyPr wrap="square">
-            <a:spAutoFit/>
-          </a:bodyPr>
-          <a:lstStyle/>
-          <a:p>
-            <a:pPr algn="ctr"/>
-            <a:r>
-              <a:rPr sz="3434" b="1" i="0">
+              <a:rPr sz="3700" b="1" i="0">
                 <a:solidFill>
                   <a:srgbClr val="FFFFFF"/>
                 </a:solidFill>
                 <a:latin typeface="Arial"/>
               </a:rPr>
               <a:t>Vamos permitir que este ar que eu respiro</a:t>
-            </a:r>
-          </a:p>
-        </p:txBody>
-      </p:sp>
-      <p:sp>
-        <p:nvSpPr>
-          <p:cNvPr id="5" name="TextBox 4"/>
-          <p:cNvSpPr txBox="1"/>
-          <p:nvPr/>
-        </p:nvSpPr>
-        <p:spPr>
-          <a:xfrm>
-            <a:off x="594360" y="4251960"/>
-            <a:ext cx="11002975" cy="347472"/>
-          </a:xfrm>
-          <a:prstGeom prst="rect">
-            <a:avLst/>
-          </a:prstGeom>
-          <a:noFill/>
-        </p:spPr>
-        <p:txBody>
-          <a:bodyPr wrap="square">
-            <a:spAutoFit/>
-          </a:bodyPr>
-          <a:lstStyle/>
-          <a:p>
-            <a:pPr algn="ctr"/>
-            <a:r>
-              <a:rPr sz="2200" b="0" i="1">
-                <a:solidFill>
-                  <a:srgbClr val="8C8C8C"/>
-                </a:solidFill>
-                <a:latin typeface="Arial"/>
-              </a:rPr>
-              <a:t/>
             </a:r>
           </a:p>
         </p:txBody>
@@ -3454,8 +3314,8 @@
         </p:nvSpPr>
         <p:spPr>
           <a:xfrm>
-            <a:off x="594360" y="2258568"/>
-            <a:ext cx="11002975" cy="685800"/>
+            <a:off x="640080" y="2052828"/>
+            <a:ext cx="10911535" cy="731520"/>
           </a:xfrm>
           <a:prstGeom prst="rect">
             <a:avLst/>
@@ -3470,7 +3330,7 @@
           <a:p>
             <a:pPr algn="ctr"/>
             <a:r>
-              <a:rPr sz="4400" b="1" i="0">
+              <a:rPr sz="4800" b="1" i="0">
                 <a:solidFill>
                   <a:srgbClr val="FFFFFF"/>
                 </a:solidFill>
@@ -3489,8 +3349,8 @@
         </p:nvSpPr>
         <p:spPr>
           <a:xfrm>
-            <a:off x="594360" y="2980944"/>
-            <a:ext cx="11002975" cy="347472"/>
+            <a:off x="640080" y="2985516"/>
+            <a:ext cx="10911535" cy="731520"/>
           </a:xfrm>
           <a:prstGeom prst="rect">
             <a:avLst/>
@@ -3505,83 +3365,13 @@
           <a:p>
             <a:pPr algn="ctr"/>
             <a:r>
-              <a:rPr sz="2200" b="0" i="1">
-                <a:solidFill>
-                  <a:srgbClr val="8C8C8C"/>
-                </a:solidFill>
-                <a:latin typeface="Arial"/>
-              </a:rPr>
-              <a:t/>
-            </a:r>
-          </a:p>
-        </p:txBody>
-      </p:sp>
-      <p:sp>
-        <p:nvSpPr>
-          <p:cNvPr id="4" name="TextBox 3"/>
-          <p:cNvSpPr txBox="1"/>
-          <p:nvPr/>
-        </p:nvSpPr>
-        <p:spPr>
-          <a:xfrm>
-            <a:off x="594360" y="3529584"/>
-            <a:ext cx="11002975" cy="685800"/>
-          </a:xfrm>
-          <a:prstGeom prst="rect">
-            <a:avLst/>
-          </a:prstGeom>
-          <a:noFill/>
-        </p:spPr>
-        <p:txBody>
-          <a:bodyPr wrap="square">
-            <a:spAutoFit/>
-          </a:bodyPr>
-          <a:lstStyle/>
-          <a:p>
-            <a:pPr algn="ctr"/>
-            <a:r>
-              <a:rPr sz="4400" b="1" i="0">
+              <a:rPr sz="4800" b="1" i="0">
                 <a:solidFill>
                   <a:srgbClr val="FFFFFF"/>
                 </a:solidFill>
                 <a:latin typeface="Arial"/>
               </a:rPr>
               <a:t>E pra sempre orarei</a:t>
-            </a:r>
-          </a:p>
-        </p:txBody>
-      </p:sp>
-      <p:sp>
-        <p:nvSpPr>
-          <p:cNvPr id="5" name="TextBox 4"/>
-          <p:cNvSpPr txBox="1"/>
-          <p:nvPr/>
-        </p:nvSpPr>
-        <p:spPr>
-          <a:xfrm>
-            <a:off x="594360" y="4251960"/>
-            <a:ext cx="11002975" cy="347472"/>
-          </a:xfrm>
-          <a:prstGeom prst="rect">
-            <a:avLst/>
-          </a:prstGeom>
-          <a:noFill/>
-        </p:spPr>
-        <p:txBody>
-          <a:bodyPr wrap="square">
-            <a:spAutoFit/>
-          </a:bodyPr>
-          <a:lstStyle/>
-          <a:p>
-            <a:pPr algn="ctr"/>
-            <a:r>
-              <a:rPr sz="2200" b="0" i="1">
-                <a:solidFill>
-                  <a:srgbClr val="8C8C8C"/>
-                </a:solidFill>
-                <a:latin typeface="Arial"/>
-              </a:rPr>
-              <a:t/>
             </a:r>
           </a:p>
         </p:txBody>
@@ -3620,8 +3410,8 @@
         </p:nvSpPr>
         <p:spPr>
           <a:xfrm>
-            <a:off x="594360" y="2258568"/>
-            <a:ext cx="11002975" cy="685800"/>
+            <a:off x="640080" y="2052828"/>
+            <a:ext cx="10911535" cy="731520"/>
           </a:xfrm>
           <a:prstGeom prst="rect">
             <a:avLst/>
@@ -3636,7 +3426,7 @@
           <a:p>
             <a:pPr algn="ctr"/>
             <a:r>
-              <a:rPr sz="3520" b="1" i="0">
+              <a:rPr sz="3800" b="1" i="0">
                 <a:solidFill>
                   <a:srgbClr val="FFFFFF"/>
                 </a:solidFill>
@@ -3655,8 +3445,8 @@
         </p:nvSpPr>
         <p:spPr>
           <a:xfrm>
-            <a:off x="594360" y="2980944"/>
-            <a:ext cx="11002975" cy="347472"/>
+            <a:off x="640080" y="2985516"/>
+            <a:ext cx="10911535" cy="731520"/>
           </a:xfrm>
           <a:prstGeom prst="rect">
             <a:avLst/>
@@ -3671,83 +3461,13 @@
           <a:p>
             <a:pPr algn="ctr"/>
             <a:r>
-              <a:rPr sz="2200" b="0" i="1">
-                <a:solidFill>
-                  <a:srgbClr val="8C8C8C"/>
-                </a:solidFill>
-                <a:latin typeface="Arial"/>
-              </a:rPr>
-              <a:t/>
-            </a:r>
-          </a:p>
-        </p:txBody>
-      </p:sp>
-      <p:sp>
-        <p:nvSpPr>
-          <p:cNvPr id="4" name="TextBox 3"/>
-          <p:cNvSpPr txBox="1"/>
-          <p:nvPr/>
-        </p:nvSpPr>
-        <p:spPr>
-          <a:xfrm>
-            <a:off x="594360" y="3529584"/>
-            <a:ext cx="11002975" cy="685800"/>
-          </a:xfrm>
-          <a:prstGeom prst="rect">
-            <a:avLst/>
-          </a:prstGeom>
-          <a:noFill/>
-        </p:spPr>
-        <p:txBody>
-          <a:bodyPr wrap="square">
-            <a:spAutoFit/>
-          </a:bodyPr>
-          <a:lstStyle/>
-          <a:p>
-            <a:pPr algn="ctr"/>
-            <a:r>
-              <a:rPr sz="4400" b="1" i="0">
+              <a:rPr sz="4800" b="1" i="0">
                 <a:solidFill>
                   <a:srgbClr val="FFFFFF"/>
                 </a:solidFill>
                 <a:latin typeface="Arial"/>
               </a:rPr>
               <a:t>Rendido ao Teu nome</a:t>
-            </a:r>
-          </a:p>
-        </p:txBody>
-      </p:sp>
-      <p:sp>
-        <p:nvSpPr>
-          <p:cNvPr id="5" name="TextBox 4"/>
-          <p:cNvSpPr txBox="1"/>
-          <p:nvPr/>
-        </p:nvSpPr>
-        <p:spPr>
-          <a:xfrm>
-            <a:off x="594360" y="4251960"/>
-            <a:ext cx="11002975" cy="347472"/>
-          </a:xfrm>
-          <a:prstGeom prst="rect">
-            <a:avLst/>
-          </a:prstGeom>
-          <a:noFill/>
-        </p:spPr>
-        <p:txBody>
-          <a:bodyPr wrap="square">
-            <a:spAutoFit/>
-          </a:bodyPr>
-          <a:lstStyle/>
-          <a:p>
-            <a:pPr algn="ctr"/>
-            <a:r>
-              <a:rPr sz="2200" b="0" i="1">
-                <a:solidFill>
-                  <a:srgbClr val="8C8C8C"/>
-                </a:solidFill>
-                <a:latin typeface="Arial"/>
-              </a:rPr>
-              <a:t/>
             </a:r>
           </a:p>
         </p:txBody>
@@ -3786,8 +3506,8 @@
         </p:nvSpPr>
         <p:spPr>
           <a:xfrm>
-            <a:off x="594360" y="2258568"/>
-            <a:ext cx="11002975" cy="685800"/>
+            <a:off x="640080" y="2052828"/>
+            <a:ext cx="10911535" cy="731520"/>
           </a:xfrm>
           <a:prstGeom prst="rect">
             <a:avLst/>
@@ -3802,7 +3522,7 @@
           <a:p>
             <a:pPr algn="ctr"/>
             <a:r>
-              <a:rPr sz="3352" b="1" i="0">
+              <a:rPr sz="3600" b="1" i="0">
                 <a:solidFill>
                   <a:srgbClr val="FFFFFF"/>
                 </a:solidFill>
@@ -3821,8 +3541,8 @@
         </p:nvSpPr>
         <p:spPr>
           <a:xfrm>
-            <a:off x="594360" y="2980944"/>
-            <a:ext cx="11002975" cy="347472"/>
+            <a:off x="640080" y="2985516"/>
+            <a:ext cx="10911535" cy="731520"/>
           </a:xfrm>
           <a:prstGeom prst="rect">
             <a:avLst/>
@@ -3837,13 +3557,13 @@
           <a:p>
             <a:pPr algn="ctr"/>
             <a:r>
-              <a:rPr sz="2200" b="0" i="1">
-                <a:solidFill>
-                  <a:srgbClr val="8C8C8C"/>
+              <a:rPr sz="4100" b="1" i="0">
+                <a:solidFill>
+                  <a:srgbClr val="FFFFFF"/>
                 </a:solidFill>
                 <a:latin typeface="Arial"/>
               </a:rPr>
-              <a:t>主の前 に立ち 手を広げ</a:t>
+              <a:t>Tome as minhas mãos e as torne limpas</a:t>
             </a:r>
           </a:p>
         </p:txBody>
@@ -3856,8 +3576,8 @@
         </p:nvSpPr>
         <p:spPr>
           <a:xfrm>
-            <a:off x="594360" y="3529584"/>
-            <a:ext cx="11002975" cy="685800"/>
+            <a:off x="640080" y="4128516"/>
+            <a:ext cx="10911535" cy="310896"/>
           </a:xfrm>
           <a:prstGeom prst="rect">
             <a:avLst/>
@@ -3872,13 +3592,13 @@
           <a:p>
             <a:pPr algn="ctr"/>
             <a:r>
-              <a:rPr sz="3805" b="1" i="0">
-                <a:solidFill>
-                  <a:srgbClr val="FFFFFF"/>
+              <a:rPr sz="2000" b="0" i="0">
+                <a:solidFill>
+                  <a:srgbClr val="828282"/>
                 </a:solidFill>
                 <a:latin typeface="Arial"/>
               </a:rPr>
-              <a:t>Tome as minhas mãos e as torne limpas</a:t>
+              <a:t>主の前 に立ち 手を広げ</a:t>
             </a:r>
           </a:p>
         </p:txBody>
@@ -3891,8 +3611,8 @@
         </p:nvSpPr>
         <p:spPr>
           <a:xfrm>
-            <a:off x="594360" y="4251960"/>
-            <a:ext cx="11002975" cy="347472"/>
+            <a:off x="640080" y="4494276"/>
+            <a:ext cx="10911535" cy="310896"/>
           </a:xfrm>
           <a:prstGeom prst="rect">
             <a:avLst/>
@@ -3907,9 +3627,9 @@
           <a:p>
             <a:pPr algn="ctr"/>
             <a:r>
-              <a:rPr sz="2200" b="0" i="1">
-                <a:solidFill>
-                  <a:srgbClr val="8C8C8C"/>
+              <a:rPr sz="2000" b="0" i="0">
+                <a:solidFill>
+                  <a:srgbClr val="828282"/>
                 </a:solidFill>
                 <a:latin typeface="Arial"/>
               </a:rPr>
@@ -3952,8 +3672,8 @@
         </p:nvSpPr>
         <p:spPr>
           <a:xfrm>
-            <a:off x="594360" y="2258568"/>
-            <a:ext cx="11002975" cy="685800"/>
+            <a:off x="640080" y="2052828"/>
+            <a:ext cx="10911535" cy="731520"/>
           </a:xfrm>
           <a:prstGeom prst="rect">
             <a:avLst/>
@@ -3968,7 +3688,7 @@
           <a:p>
             <a:pPr algn="ctr"/>
             <a:r>
-              <a:rPr sz="4400" b="1" i="0">
+              <a:rPr sz="4800" b="1" i="0">
                 <a:solidFill>
                   <a:srgbClr val="FFFFFF"/>
                 </a:solidFill>
@@ -3987,8 +3707,8 @@
         </p:nvSpPr>
         <p:spPr>
           <a:xfrm>
-            <a:off x="594360" y="2980944"/>
-            <a:ext cx="11002975" cy="347472"/>
+            <a:off x="640080" y="2985516"/>
+            <a:ext cx="10911535" cy="731520"/>
           </a:xfrm>
           <a:prstGeom prst="rect">
             <a:avLst/>
@@ -4003,83 +3723,13 @@
           <a:p>
             <a:pPr algn="ctr"/>
             <a:r>
-              <a:rPr sz="2200" b="0" i="1">
-                <a:solidFill>
-                  <a:srgbClr val="8C8C8C"/>
-                </a:solidFill>
-                <a:latin typeface="Arial"/>
-              </a:rPr>
-              <a:t/>
-            </a:r>
-          </a:p>
-        </p:txBody>
-      </p:sp>
-      <p:sp>
-        <p:nvSpPr>
-          <p:cNvPr id="4" name="TextBox 3"/>
-          <p:cNvSpPr txBox="1"/>
-          <p:nvPr/>
-        </p:nvSpPr>
-        <p:spPr>
-          <a:xfrm>
-            <a:off x="594360" y="3529584"/>
-            <a:ext cx="11002975" cy="685800"/>
-          </a:xfrm>
-          <a:prstGeom prst="rect">
-            <a:avLst/>
-          </a:prstGeom>
-          <a:noFill/>
-        </p:spPr>
-        <p:txBody>
-          <a:bodyPr wrap="square">
-            <a:spAutoFit/>
-          </a:bodyPr>
-          <a:lstStyle/>
-          <a:p>
-            <a:pPr algn="ctr"/>
-            <a:r>
-              <a:rPr sz="2656" b="1" i="0">
+              <a:rPr sz="2800" b="1" i="0">
                 <a:solidFill>
                   <a:srgbClr val="FFFFFF"/>
                 </a:solidFill>
                 <a:latin typeface="Arial"/>
               </a:rPr>
               <a:t>Para que eu possa andar em tudo que você tem para mim</a:t>
-            </a:r>
-          </a:p>
-        </p:txBody>
-      </p:sp>
-      <p:sp>
-        <p:nvSpPr>
-          <p:cNvPr id="5" name="TextBox 4"/>
-          <p:cNvSpPr txBox="1"/>
-          <p:nvPr/>
-        </p:nvSpPr>
-        <p:spPr>
-          <a:xfrm>
-            <a:off x="594360" y="4251960"/>
-            <a:ext cx="11002975" cy="347472"/>
-          </a:xfrm>
-          <a:prstGeom prst="rect">
-            <a:avLst/>
-          </a:prstGeom>
-          <a:noFill/>
-        </p:spPr>
-        <p:txBody>
-          <a:bodyPr wrap="square">
-            <a:spAutoFit/>
-          </a:bodyPr>
-          <a:lstStyle/>
-          <a:p>
-            <a:pPr algn="ctr"/>
-            <a:r>
-              <a:rPr sz="2200" b="0" i="1">
-                <a:solidFill>
-                  <a:srgbClr val="8C8C8C"/>
-                </a:solidFill>
-                <a:latin typeface="Arial"/>
-              </a:rPr>
-              <a:t/>
             </a:r>
           </a:p>
         </p:txBody>
@@ -4118,8 +3768,8 @@
         </p:nvSpPr>
         <p:spPr>
           <a:xfrm>
-            <a:off x="594360" y="2258568"/>
-            <a:ext cx="11002975" cy="685800"/>
+            <a:off x="640080" y="2052828"/>
+            <a:ext cx="10911535" cy="731520"/>
           </a:xfrm>
           <a:prstGeom prst="rect">
             <a:avLst/>
@@ -4134,7 +3784,7 @@
           <a:p>
             <a:pPr algn="ctr"/>
             <a:r>
-              <a:rPr sz="4266" b="1" i="0">
+              <a:rPr sz="4600" b="1" i="0">
                 <a:solidFill>
                   <a:srgbClr val="FFFFFF"/>
                 </a:solidFill>
@@ -4153,8 +3803,8 @@
         </p:nvSpPr>
         <p:spPr>
           <a:xfrm>
-            <a:off x="594360" y="2980944"/>
-            <a:ext cx="11002975" cy="347472"/>
+            <a:off x="640080" y="2985516"/>
+            <a:ext cx="10911535" cy="731520"/>
           </a:xfrm>
           <a:prstGeom prst="rect">
             <a:avLst/>
@@ -4169,83 +3819,13 @@
           <a:p>
             <a:pPr algn="ctr"/>
             <a:r>
-              <a:rPr sz="2200" b="0" i="1">
-                <a:solidFill>
-                  <a:srgbClr val="8C8C8C"/>
-                </a:solidFill>
-                <a:latin typeface="Arial"/>
-              </a:rPr>
-              <a:t/>
-            </a:r>
-          </a:p>
-        </p:txBody>
-      </p:sp>
-      <p:sp>
-        <p:nvSpPr>
-          <p:cNvPr id="4" name="TextBox 3"/>
-          <p:cNvSpPr txBox="1"/>
-          <p:nvPr/>
-        </p:nvSpPr>
-        <p:spPr>
-          <a:xfrm>
-            <a:off x="594360" y="3529584"/>
-            <a:ext cx="11002975" cy="685800"/>
-          </a:xfrm>
-          <a:prstGeom prst="rect">
-            <a:avLst/>
-          </a:prstGeom>
-          <a:noFill/>
-        </p:spPr>
-        <p:txBody>
-          <a:bodyPr wrap="square">
-            <a:spAutoFit/>
-          </a:bodyPr>
-          <a:lstStyle/>
-          <a:p>
-            <a:pPr algn="ctr"/>
-            <a:r>
-              <a:rPr sz="3705" b="1" i="0">
+              <a:rPr sz="4000" b="1" i="0">
                 <a:solidFill>
                   <a:srgbClr val="FFFFFF"/>
                 </a:solidFill>
                 <a:latin typeface="Arial"/>
               </a:rPr>
               <a:t>Toda a minha vida é sua Eu te dou tudo</a:t>
-            </a:r>
-          </a:p>
-        </p:txBody>
-      </p:sp>
-      <p:sp>
-        <p:nvSpPr>
-          <p:cNvPr id="5" name="TextBox 4"/>
-          <p:cNvSpPr txBox="1"/>
-          <p:nvPr/>
-        </p:nvSpPr>
-        <p:spPr>
-          <a:xfrm>
-            <a:off x="594360" y="4251960"/>
-            <a:ext cx="11002975" cy="347472"/>
-          </a:xfrm>
-          <a:prstGeom prst="rect">
-            <a:avLst/>
-          </a:prstGeom>
-          <a:noFill/>
-        </p:spPr>
-        <p:txBody>
-          <a:bodyPr wrap="square">
-            <a:spAutoFit/>
-          </a:bodyPr>
-          <a:lstStyle/>
-          <a:p>
-            <a:pPr algn="ctr"/>
-            <a:r>
-              <a:rPr sz="2200" b="0" i="1">
-                <a:solidFill>
-                  <a:srgbClr val="8C8C8C"/>
-                </a:solidFill>
-                <a:latin typeface="Arial"/>
-              </a:rPr>
-              <a:t/>
             </a:r>
           </a:p>
         </p:txBody>
@@ -4284,8 +3864,8 @@
         </p:nvSpPr>
         <p:spPr>
           <a:xfrm>
-            <a:off x="594360" y="2258568"/>
-            <a:ext cx="11002975" cy="685800"/>
+            <a:off x="640080" y="2052828"/>
+            <a:ext cx="10911535" cy="731520"/>
           </a:xfrm>
           <a:prstGeom prst="rect">
             <a:avLst/>
@@ -4300,7 +3880,7 @@
           <a:p>
             <a:pPr algn="ctr"/>
             <a:r>
-              <a:rPr sz="4400" b="1" i="0">
+              <a:rPr sz="4800" b="1" i="0">
                 <a:solidFill>
                   <a:srgbClr val="FFFFFF"/>
                 </a:solidFill>
@@ -4319,8 +3899,8 @@
         </p:nvSpPr>
         <p:spPr>
           <a:xfrm>
-            <a:off x="594360" y="2980944"/>
-            <a:ext cx="11002975" cy="347472"/>
+            <a:off x="640080" y="2985516"/>
+            <a:ext cx="10911535" cy="731520"/>
           </a:xfrm>
           <a:prstGeom prst="rect">
             <a:avLst/>
@@ -4335,83 +3915,13 @@
           <a:p>
             <a:pPr algn="ctr"/>
             <a:r>
-              <a:rPr sz="2200" b="0" i="1">
-                <a:solidFill>
-                  <a:srgbClr val="8C8C8C"/>
-                </a:solidFill>
-                <a:latin typeface="Arial"/>
-              </a:rPr>
-              <a:t/>
-            </a:r>
-          </a:p>
-        </p:txBody>
-      </p:sp>
-      <p:sp>
-        <p:nvSpPr>
-          <p:cNvPr id="4" name="TextBox 3"/>
-          <p:cNvSpPr txBox="1"/>
-          <p:nvPr/>
-        </p:nvSpPr>
-        <p:spPr>
-          <a:xfrm>
-            <a:off x="594360" y="3529584"/>
-            <a:ext cx="11002975" cy="685800"/>
-          </a:xfrm>
-          <a:prstGeom prst="rect">
-            <a:avLst/>
-          </a:prstGeom>
-          <a:noFill/>
-        </p:spPr>
-        <p:txBody>
-          <a:bodyPr wrap="square">
-            <a:spAutoFit/>
-          </a:bodyPr>
-          <a:lstStyle/>
-          <a:p>
-            <a:pPr algn="ctr"/>
-            <a:r>
-              <a:rPr sz="4266" b="1" i="0">
+              <a:rPr sz="4600" b="1" i="0">
                 <a:solidFill>
                   <a:srgbClr val="FFFFFF"/>
                 </a:solidFill>
                 <a:latin typeface="Arial"/>
               </a:rPr>
               <a:t>Oh, eu sou Teu e Tu és meu, Jesus</a:t>
-            </a:r>
-          </a:p>
-        </p:txBody>
-      </p:sp>
-      <p:sp>
-        <p:nvSpPr>
-          <p:cNvPr id="5" name="TextBox 4"/>
-          <p:cNvSpPr txBox="1"/>
-          <p:nvPr/>
-        </p:nvSpPr>
-        <p:spPr>
-          <a:xfrm>
-            <a:off x="594360" y="4251960"/>
-            <a:ext cx="11002975" cy="347472"/>
-          </a:xfrm>
-          <a:prstGeom prst="rect">
-            <a:avLst/>
-          </a:prstGeom>
-          <a:noFill/>
-        </p:spPr>
-        <p:txBody>
-          <a:bodyPr wrap="square">
-            <a:spAutoFit/>
-          </a:bodyPr>
-          <a:lstStyle/>
-          <a:p>
-            <a:pPr algn="ctr"/>
-            <a:r>
-              <a:rPr sz="2200" b="0" i="1">
-                <a:solidFill>
-                  <a:srgbClr val="8C8C8C"/>
-                </a:solidFill>
-                <a:latin typeface="Arial"/>
-              </a:rPr>
-              <a:t/>
             </a:r>
           </a:p>
         </p:txBody>
@@ -4450,8 +3960,8 @@
         </p:nvSpPr>
         <p:spPr>
           <a:xfrm>
-            <a:off x="594360" y="2258568"/>
-            <a:ext cx="11002975" cy="685800"/>
+            <a:off x="640080" y="2052828"/>
+            <a:ext cx="10911535" cy="731520"/>
           </a:xfrm>
           <a:prstGeom prst="rect">
             <a:avLst/>
@@ -4466,7 +3976,7 @@
           <a:p>
             <a:pPr algn="ctr"/>
             <a:r>
-              <a:rPr sz="4400" b="1" i="0">
+              <a:rPr sz="4800" b="1" i="0">
                 <a:solidFill>
                   <a:srgbClr val="FFFFFF"/>
                 </a:solidFill>
@@ -4485,8 +3995,8 @@
         </p:nvSpPr>
         <p:spPr>
           <a:xfrm>
-            <a:off x="594360" y="2980944"/>
-            <a:ext cx="11002975" cy="347472"/>
+            <a:off x="640080" y="2985516"/>
+            <a:ext cx="10911535" cy="731520"/>
           </a:xfrm>
           <a:prstGeom prst="rect">
             <a:avLst/>
@@ -4501,83 +4011,13 @@
           <a:p>
             <a:pPr algn="ctr"/>
             <a:r>
-              <a:rPr sz="2200" b="0" i="1">
-                <a:solidFill>
-                  <a:srgbClr val="8C8C8C"/>
-                </a:solidFill>
-                <a:latin typeface="Arial"/>
-              </a:rPr>
-              <a:t/>
-            </a:r>
-          </a:p>
-        </p:txBody>
-      </p:sp>
-      <p:sp>
-        <p:nvSpPr>
-          <p:cNvPr id="4" name="TextBox 3"/>
-          <p:cNvSpPr txBox="1"/>
-          <p:nvPr/>
-        </p:nvSpPr>
-        <p:spPr>
-          <a:xfrm>
-            <a:off x="594360" y="3529584"/>
-            <a:ext cx="11002975" cy="685800"/>
-          </a:xfrm>
-          <a:prstGeom prst="rect">
-            <a:avLst/>
-          </a:prstGeom>
-          <a:noFill/>
-        </p:spPr>
-        <p:txBody>
-          <a:bodyPr wrap="square">
-            <a:spAutoFit/>
-          </a:bodyPr>
-          <a:lstStyle/>
-          <a:p>
-            <a:pPr algn="ctr"/>
-            <a:r>
-              <a:rPr sz="3434" b="1" i="0">
+              <a:rPr sz="3700" b="1" i="0">
                 <a:solidFill>
                   <a:srgbClr val="FFFFFF"/>
                 </a:solidFill>
                 <a:latin typeface="Arial"/>
               </a:rPr>
               <a:t>Vamos permitir que este ar que eu respiro</a:t>
-            </a:r>
-          </a:p>
-        </p:txBody>
-      </p:sp>
-      <p:sp>
-        <p:nvSpPr>
-          <p:cNvPr id="5" name="TextBox 4"/>
-          <p:cNvSpPr txBox="1"/>
-          <p:nvPr/>
-        </p:nvSpPr>
-        <p:spPr>
-          <a:xfrm>
-            <a:off x="594360" y="4251960"/>
-            <a:ext cx="11002975" cy="347472"/>
-          </a:xfrm>
-          <a:prstGeom prst="rect">
-            <a:avLst/>
-          </a:prstGeom>
-          <a:noFill/>
-        </p:spPr>
-        <p:txBody>
-          <a:bodyPr wrap="square">
-            <a:spAutoFit/>
-          </a:bodyPr>
-          <a:lstStyle/>
-          <a:p>
-            <a:pPr algn="ctr"/>
-            <a:r>
-              <a:rPr sz="2200" b="0" i="1">
-                <a:solidFill>
-                  <a:srgbClr val="8C8C8C"/>
-                </a:solidFill>
-                <a:latin typeface="Arial"/>
-              </a:rPr>
-              <a:t/>
             </a:r>
           </a:p>
         </p:txBody>
@@ -4616,8 +4056,8 @@
         </p:nvSpPr>
         <p:spPr>
           <a:xfrm>
-            <a:off x="594360" y="2258568"/>
-            <a:ext cx="11002975" cy="685800"/>
+            <a:off x="640080" y="2052828"/>
+            <a:ext cx="10911535" cy="731520"/>
           </a:xfrm>
           <a:prstGeom prst="rect">
             <a:avLst/>
@@ -4632,7 +4072,7 @@
           <a:p>
             <a:pPr algn="ctr"/>
             <a:r>
-              <a:rPr sz="4400" b="1" i="0">
+              <a:rPr sz="4800" b="1" i="0">
                 <a:solidFill>
                   <a:srgbClr val="FFFFFF"/>
                 </a:solidFill>
@@ -4651,8 +4091,8 @@
         </p:nvSpPr>
         <p:spPr>
           <a:xfrm>
-            <a:off x="594360" y="2980944"/>
-            <a:ext cx="11002975" cy="347472"/>
+            <a:off x="640080" y="2985516"/>
+            <a:ext cx="10911535" cy="731520"/>
           </a:xfrm>
           <a:prstGeom prst="rect">
             <a:avLst/>
@@ -4667,83 +4107,13 @@
           <a:p>
             <a:pPr algn="ctr"/>
             <a:r>
-              <a:rPr sz="2200" b="0" i="1">
-                <a:solidFill>
-                  <a:srgbClr val="8C8C8C"/>
-                </a:solidFill>
-                <a:latin typeface="Arial"/>
-              </a:rPr>
-              <a:t/>
-            </a:r>
-          </a:p>
-        </p:txBody>
-      </p:sp>
-      <p:sp>
-        <p:nvSpPr>
-          <p:cNvPr id="4" name="TextBox 3"/>
-          <p:cNvSpPr txBox="1"/>
-          <p:nvPr/>
-        </p:nvSpPr>
-        <p:spPr>
-          <a:xfrm>
-            <a:off x="594360" y="3529584"/>
-            <a:ext cx="11002975" cy="685800"/>
-          </a:xfrm>
-          <a:prstGeom prst="rect">
-            <a:avLst/>
-          </a:prstGeom>
-          <a:noFill/>
-        </p:spPr>
-        <p:txBody>
-          <a:bodyPr wrap="square">
-            <a:spAutoFit/>
-          </a:bodyPr>
-          <a:lstStyle/>
-          <a:p>
-            <a:pPr algn="ctr"/>
-            <a:r>
-              <a:rPr sz="4400" b="1" i="0">
+              <a:rPr sz="4800" b="1" i="0">
                 <a:solidFill>
                   <a:srgbClr val="FFFFFF"/>
                 </a:solidFill>
                 <a:latin typeface="Arial"/>
               </a:rPr>
               <a:t>E pra sempre orarei</a:t>
-            </a:r>
-          </a:p>
-        </p:txBody>
-      </p:sp>
-      <p:sp>
-        <p:nvSpPr>
-          <p:cNvPr id="5" name="TextBox 4"/>
-          <p:cNvSpPr txBox="1"/>
-          <p:nvPr/>
-        </p:nvSpPr>
-        <p:spPr>
-          <a:xfrm>
-            <a:off x="594360" y="4251960"/>
-            <a:ext cx="11002975" cy="347472"/>
-          </a:xfrm>
-          <a:prstGeom prst="rect">
-            <a:avLst/>
-          </a:prstGeom>
-          <a:noFill/>
-        </p:spPr>
-        <p:txBody>
-          <a:bodyPr wrap="square">
-            <a:spAutoFit/>
-          </a:bodyPr>
-          <a:lstStyle/>
-          <a:p>
-            <a:pPr algn="ctr"/>
-            <a:r>
-              <a:rPr sz="2200" b="0" i="1">
-                <a:solidFill>
-                  <a:srgbClr val="8C8C8C"/>
-                </a:solidFill>
-                <a:latin typeface="Arial"/>
-              </a:rPr>
-              <a:t/>
             </a:r>
           </a:p>
         </p:txBody>
@@ -4782,8 +4152,8 @@
         </p:nvSpPr>
         <p:spPr>
           <a:xfrm>
-            <a:off x="594360" y="2258568"/>
-            <a:ext cx="11002975" cy="685800"/>
+            <a:off x="640080" y="2052828"/>
+            <a:ext cx="10911535" cy="731520"/>
           </a:xfrm>
           <a:prstGeom prst="rect">
             <a:avLst/>
@@ -4798,7 +4168,7 @@
           <a:p>
             <a:pPr algn="ctr"/>
             <a:r>
-              <a:rPr sz="3520" b="1" i="0">
+              <a:rPr sz="3800" b="1" i="0">
                 <a:solidFill>
                   <a:srgbClr val="FFFFFF"/>
                 </a:solidFill>
@@ -4817,8 +4187,8 @@
         </p:nvSpPr>
         <p:spPr>
           <a:xfrm>
-            <a:off x="594360" y="2980944"/>
-            <a:ext cx="11002975" cy="347472"/>
+            <a:off x="640080" y="2985516"/>
+            <a:ext cx="10911535" cy="731520"/>
           </a:xfrm>
           <a:prstGeom prst="rect">
             <a:avLst/>
@@ -4833,83 +4203,13 @@
           <a:p>
             <a:pPr algn="ctr"/>
             <a:r>
-              <a:rPr sz="2200" b="0" i="1">
-                <a:solidFill>
-                  <a:srgbClr val="8C8C8C"/>
-                </a:solidFill>
-                <a:latin typeface="Arial"/>
-              </a:rPr>
-              <a:t/>
-            </a:r>
-          </a:p>
-        </p:txBody>
-      </p:sp>
-      <p:sp>
-        <p:nvSpPr>
-          <p:cNvPr id="4" name="TextBox 3"/>
-          <p:cNvSpPr txBox="1"/>
-          <p:nvPr/>
-        </p:nvSpPr>
-        <p:spPr>
-          <a:xfrm>
-            <a:off x="594360" y="3529584"/>
-            <a:ext cx="11002975" cy="685800"/>
-          </a:xfrm>
-          <a:prstGeom prst="rect">
-            <a:avLst/>
-          </a:prstGeom>
-          <a:noFill/>
-        </p:spPr>
-        <p:txBody>
-          <a:bodyPr wrap="square">
-            <a:spAutoFit/>
-          </a:bodyPr>
-          <a:lstStyle/>
-          <a:p>
-            <a:pPr algn="ctr"/>
-            <a:r>
-              <a:rPr sz="4400" b="1" i="0">
+              <a:rPr sz="4800" b="1" i="0">
                 <a:solidFill>
                   <a:srgbClr val="FFFFFF"/>
                 </a:solidFill>
                 <a:latin typeface="Arial"/>
               </a:rPr>
               <a:t>Rendido ao Teu nome</a:t>
-            </a:r>
-          </a:p>
-        </p:txBody>
-      </p:sp>
-      <p:sp>
-        <p:nvSpPr>
-          <p:cNvPr id="5" name="TextBox 4"/>
-          <p:cNvSpPr txBox="1"/>
-          <p:nvPr/>
-        </p:nvSpPr>
-        <p:spPr>
-          <a:xfrm>
-            <a:off x="594360" y="4251960"/>
-            <a:ext cx="11002975" cy="347472"/>
-          </a:xfrm>
-          <a:prstGeom prst="rect">
-            <a:avLst/>
-          </a:prstGeom>
-          <a:noFill/>
-        </p:spPr>
-        <p:txBody>
-          <a:bodyPr wrap="square">
-            <a:spAutoFit/>
-          </a:bodyPr>
-          <a:lstStyle/>
-          <a:p>
-            <a:pPr algn="ctr"/>
-            <a:r>
-              <a:rPr sz="2200" b="0" i="1">
-                <a:solidFill>
-                  <a:srgbClr val="8C8C8C"/>
-                </a:solidFill>
-                <a:latin typeface="Arial"/>
-              </a:rPr>
-              <a:t/>
             </a:r>
           </a:p>
         </p:txBody>
@@ -4948,8 +4248,8 @@
         </p:nvSpPr>
         <p:spPr>
           <a:xfrm>
-            <a:off x="594360" y="2894076"/>
-            <a:ext cx="11002975" cy="685800"/>
+            <a:off x="640080" y="2702052"/>
+            <a:ext cx="10911535" cy="731520"/>
           </a:xfrm>
           <a:prstGeom prst="rect">
             <a:avLst/>
@@ -4964,48 +4264,13 @@
           <a:p>
             <a:pPr algn="ctr"/>
             <a:r>
-              <a:rPr sz="4400" b="1" i="0">
+              <a:rPr sz="4800" b="1" i="0">
                 <a:solidFill>
                   <a:srgbClr val="FFFFFF"/>
                 </a:solidFill>
                 <a:latin typeface="Arial"/>
               </a:rPr>
               <a:t>Na cruz, onde eu me encontro</a:t>
-            </a:r>
-          </a:p>
-        </p:txBody>
-      </p:sp>
-      <p:sp>
-        <p:nvSpPr>
-          <p:cNvPr id="3" name="TextBox 2"/>
-          <p:cNvSpPr txBox="1"/>
-          <p:nvPr/>
-        </p:nvSpPr>
-        <p:spPr>
-          <a:xfrm>
-            <a:off x="594360" y="3616452"/>
-            <a:ext cx="11002975" cy="347472"/>
-          </a:xfrm>
-          <a:prstGeom prst="rect">
-            <a:avLst/>
-          </a:prstGeom>
-          <a:noFill/>
-        </p:spPr>
-        <p:txBody>
-          <a:bodyPr wrap="square">
-            <a:spAutoFit/>
-          </a:bodyPr>
-          <a:lstStyle/>
-          <a:p>
-            <a:pPr algn="ctr"/>
-            <a:r>
-              <a:rPr sz="2200" b="0" i="1">
-                <a:solidFill>
-                  <a:srgbClr val="8C8C8C"/>
-                </a:solidFill>
-                <a:latin typeface="Arial"/>
-              </a:rPr>
-              <a:t/>
             </a:r>
           </a:p>
         </p:txBody>
@@ -5044,8 +4309,8 @@
         </p:nvSpPr>
         <p:spPr>
           <a:xfrm>
-            <a:off x="594360" y="1837944"/>
-            <a:ext cx="11002975" cy="685800"/>
+            <a:off x="640080" y="1650492"/>
+            <a:ext cx="10911535" cy="731520"/>
           </a:xfrm>
           <a:prstGeom prst="rect">
             <a:avLst/>
@@ -5060,7 +4325,7 @@
           <a:p>
             <a:pPr algn="ctr"/>
             <a:r>
-              <a:rPr sz="4223" b="1" i="0">
+              <a:rPr sz="4600" b="1" i="0">
                 <a:solidFill>
                   <a:srgbClr val="FFFFFF"/>
                 </a:solidFill>
@@ -5079,8 +4344,8 @@
         </p:nvSpPr>
         <p:spPr>
           <a:xfrm>
-            <a:off x="594360" y="2560320"/>
-            <a:ext cx="11002975" cy="384048"/>
+            <a:off x="640080" y="2418588"/>
+            <a:ext cx="10911535" cy="365760"/>
           </a:xfrm>
           <a:prstGeom prst="rect">
             <a:avLst/>
@@ -5097,7 +4362,7 @@
             <a:r>
               <a:rPr sz="2400" b="0" i="1">
                 <a:solidFill>
-                  <a:srgbClr val="B4B4B4"/>
+                  <a:srgbClr val="AAAAAA"/>
                 </a:solidFill>
                 <a:latin typeface="Arial"/>
               </a:rPr>
@@ -5114,8 +4379,8 @@
         </p:nvSpPr>
         <p:spPr>
           <a:xfrm>
-            <a:off x="594360" y="2980944"/>
-            <a:ext cx="11002975" cy="347472"/>
+            <a:off x="640080" y="2985516"/>
+            <a:ext cx="10911535" cy="731520"/>
           </a:xfrm>
           <a:prstGeom prst="rect">
             <a:avLst/>
@@ -5130,13 +4395,13 @@
           <a:p>
             <a:pPr algn="ctr"/>
             <a:r>
-              <a:rPr sz="2000" b="0" i="1">
-                <a:solidFill>
-                  <a:srgbClr val="8C8C8C"/>
+              <a:rPr sz="4800" b="1" i="0">
+                <a:solidFill>
+                  <a:srgbClr val="FFFFFF"/>
                 </a:solidFill>
                 <a:latin typeface="Arial"/>
               </a:rPr>
-              <a:t/>
+              <a:t>主の想い    歩ませて</a:t>
             </a:r>
           </a:p>
         </p:txBody>
@@ -5149,8 +4414,8 @@
         </p:nvSpPr>
         <p:spPr>
           <a:xfrm>
-            <a:off x="594360" y="3529584"/>
-            <a:ext cx="11002975" cy="685800"/>
+            <a:off x="640080" y="3753612"/>
+            <a:ext cx="10911535" cy="365760"/>
           </a:xfrm>
           <a:prstGeom prst="rect">
             <a:avLst/>
@@ -5165,13 +4430,13 @@
           <a:p>
             <a:pPr algn="ctr"/>
             <a:r>
-              <a:rPr sz="4400" b="1" i="0">
-                <a:solidFill>
-                  <a:srgbClr val="FFFFFF"/>
+              <a:rPr sz="2400" b="0" i="1">
+                <a:solidFill>
+                  <a:srgbClr val="AAAAAA"/>
                 </a:solidFill>
                 <a:latin typeface="Arial"/>
               </a:rPr>
-              <a:t>主の想い    歩ませて</a:t>
+              <a:t>shu no omoi ayumasete</a:t>
             </a:r>
           </a:p>
         </p:txBody>
@@ -5184,8 +4449,8 @@
         </p:nvSpPr>
         <p:spPr>
           <a:xfrm>
-            <a:off x="594360" y="4251960"/>
-            <a:ext cx="11002975" cy="384048"/>
+            <a:off x="640080" y="4530852"/>
+            <a:ext cx="10911535" cy="310896"/>
           </a:xfrm>
           <a:prstGeom prst="rect">
             <a:avLst/>
@@ -5200,13 +4465,13 @@
           <a:p>
             <a:pPr algn="ctr"/>
             <a:r>
-              <a:rPr sz="2400" b="0" i="1">
-                <a:solidFill>
-                  <a:srgbClr val="B4B4B4"/>
+              <a:rPr sz="2000" b="0" i="1">
+                <a:solidFill>
+                  <a:srgbClr val="828282"/>
                 </a:solidFill>
                 <a:latin typeface="Arial"/>
               </a:rPr>
-              <a:t>shu no omoi ayumasete</a:t>
+              <a:t>De Braços Bem Abertos</a:t>
             </a:r>
           </a:p>
         </p:txBody>
@@ -5219,8 +4484,8 @@
         </p:nvSpPr>
         <p:spPr>
           <a:xfrm>
-            <a:off x="594360" y="4672584"/>
-            <a:ext cx="11002975" cy="347472"/>
+            <a:off x="640080" y="4896612"/>
+            <a:ext cx="10911535" cy="310896"/>
           </a:xfrm>
           <a:prstGeom prst="rect">
             <a:avLst/>
@@ -5237,11 +4502,11 @@
             <a:r>
               <a:rPr sz="2000" b="0" i="1">
                 <a:solidFill>
-                  <a:srgbClr val="8C8C8C"/>
+                  <a:srgbClr val="828282"/>
                 </a:solidFill>
                 <a:latin typeface="Arial"/>
               </a:rPr>
-              <a:t/>
+              <a:t>Tome a minha vida, Eu te entrego</a:t>
             </a:r>
           </a:p>
         </p:txBody>
@@ -5280,8 +4545,8 @@
         </p:nvSpPr>
         <p:spPr>
           <a:xfrm>
-            <a:off x="594360" y="1837944"/>
-            <a:ext cx="11002975" cy="685800"/>
+            <a:off x="640080" y="1650492"/>
+            <a:ext cx="10911535" cy="731520"/>
           </a:xfrm>
           <a:prstGeom prst="rect">
             <a:avLst/>
@@ -5296,7 +4561,7 @@
           <a:p>
             <a:pPr algn="ctr"/>
             <a:r>
-              <a:rPr sz="4400" b="1" i="0">
+              <a:rPr sz="4800" b="1" i="0">
                 <a:solidFill>
                   <a:srgbClr val="FFFFFF"/>
                 </a:solidFill>
@@ -5315,8 +4580,8 @@
         </p:nvSpPr>
         <p:spPr>
           <a:xfrm>
-            <a:off x="594360" y="2560320"/>
-            <a:ext cx="11002975" cy="384048"/>
+            <a:off x="640080" y="2418588"/>
+            <a:ext cx="10911535" cy="365760"/>
           </a:xfrm>
           <a:prstGeom prst="rect">
             <a:avLst/>
@@ -5333,7 +4598,7 @@
             <a:r>
               <a:rPr sz="2400" b="0" i="1">
                 <a:solidFill>
-                  <a:srgbClr val="B4B4B4"/>
+                  <a:srgbClr val="AAAAAA"/>
                 </a:solidFill>
                 <a:latin typeface="Arial"/>
               </a:rPr>
@@ -5350,8 +4615,8 @@
         </p:nvSpPr>
         <p:spPr>
           <a:xfrm>
-            <a:off x="594360" y="2980944"/>
-            <a:ext cx="11002975" cy="347472"/>
+            <a:off x="640080" y="2985516"/>
+            <a:ext cx="10911535" cy="731520"/>
           </a:xfrm>
           <a:prstGeom prst="rect">
             <a:avLst/>
@@ -5366,13 +4631,13 @@
           <a:p>
             <a:pPr algn="ctr"/>
             <a:r>
-              <a:rPr sz="2000" b="0" i="1">
-                <a:solidFill>
-                  <a:srgbClr val="8C8C8C"/>
+              <a:rPr sz="4800" b="1" i="0">
+                <a:solidFill>
+                  <a:srgbClr val="FFFFFF"/>
                 </a:solidFill>
                 <a:latin typeface="Arial"/>
               </a:rPr>
-              <a:t>Tudo que eu tenho, Eu entrego a ti oh Deus</a:t>
+              <a:t>私の すべて  捧げる</a:t>
             </a:r>
           </a:p>
         </p:txBody>
@@ -5385,8 +4650,8 @@
         </p:nvSpPr>
         <p:spPr>
           <a:xfrm>
-            <a:off x="594360" y="3529584"/>
-            <a:ext cx="11002975" cy="685800"/>
+            <a:off x="640080" y="3753612"/>
+            <a:ext cx="10911535" cy="365760"/>
           </a:xfrm>
           <a:prstGeom prst="rect">
             <a:avLst/>
@@ -5401,13 +4666,13 @@
           <a:p>
             <a:pPr algn="ctr"/>
             <a:r>
-              <a:rPr sz="4400" b="1" i="0">
-                <a:solidFill>
-                  <a:srgbClr val="FFFFFF"/>
+              <a:rPr sz="2400" b="0" i="1">
+                <a:solidFill>
+                  <a:srgbClr val="AAAAAA"/>
                 </a:solidFill>
                 <a:latin typeface="Arial"/>
               </a:rPr>
-              <a:t>私の すべて  捧げる</a:t>
+              <a:t>watashi no subete sasageru</a:t>
             </a:r>
           </a:p>
         </p:txBody>
@@ -5420,8 +4685,8 @@
         </p:nvSpPr>
         <p:spPr>
           <a:xfrm>
-            <a:off x="594360" y="4251960"/>
-            <a:ext cx="11002975" cy="384048"/>
+            <a:off x="640080" y="4530852"/>
+            <a:ext cx="10911535" cy="310896"/>
           </a:xfrm>
           <a:prstGeom prst="rect">
             <a:avLst/>
@@ -5436,13 +4701,13 @@
           <a:p>
             <a:pPr algn="ctr"/>
             <a:r>
-              <a:rPr sz="2400" b="0" i="1">
-                <a:solidFill>
-                  <a:srgbClr val="B4B4B4"/>
+              <a:rPr sz="2000" b="0" i="1">
+                <a:solidFill>
+                  <a:srgbClr val="828282"/>
                 </a:solidFill>
                 <a:latin typeface="Arial"/>
               </a:rPr>
-              <a:t>watashi no subete sasageru</a:t>
+              <a:t>Tudo que eu tenho, Eu entrego a ti oh Deus</a:t>
             </a:r>
           </a:p>
         </p:txBody>
@@ -5455,8 +4720,8 @@
         </p:nvSpPr>
         <p:spPr>
           <a:xfrm>
-            <a:off x="594360" y="4672584"/>
-            <a:ext cx="11002975" cy="347472"/>
+            <a:off x="640080" y="4896612"/>
+            <a:ext cx="10911535" cy="310896"/>
           </a:xfrm>
           <a:prstGeom prst="rect">
             <a:avLst/>
@@ -5473,7 +4738,7 @@
             <a:r>
               <a:rPr sz="2000" b="0" i="1">
                 <a:solidFill>
-                  <a:srgbClr val="8C8C8C"/>
+                  <a:srgbClr val="828282"/>
                 </a:solidFill>
                 <a:latin typeface="Arial"/>
               </a:rPr>
@@ -5516,8 +4781,8 @@
         </p:nvSpPr>
         <p:spPr>
           <a:xfrm>
-            <a:off x="594360" y="1837944"/>
-            <a:ext cx="11002975" cy="685800"/>
+            <a:off x="640080" y="1650492"/>
+            <a:ext cx="10911535" cy="731520"/>
           </a:xfrm>
           <a:prstGeom prst="rect">
             <a:avLst/>
@@ -5532,7 +4797,7 @@
           <a:p>
             <a:pPr algn="ctr"/>
             <a:r>
-              <a:rPr sz="4400" b="1" i="0">
+              <a:rPr sz="4800" b="1" i="0">
                 <a:solidFill>
                   <a:srgbClr val="FFFFFF"/>
                 </a:solidFill>
@@ -5551,8 +4816,8 @@
         </p:nvSpPr>
         <p:spPr>
           <a:xfrm>
-            <a:off x="594360" y="2560320"/>
-            <a:ext cx="11002975" cy="384048"/>
+            <a:off x="640080" y="2418588"/>
+            <a:ext cx="10911535" cy="365760"/>
           </a:xfrm>
           <a:prstGeom prst="rect">
             <a:avLst/>
@@ -5569,7 +4834,7 @@
             <a:r>
               <a:rPr sz="2400" b="0" i="1">
                 <a:solidFill>
-                  <a:srgbClr val="B4B4B4"/>
+                  <a:srgbClr val="AAAAAA"/>
                 </a:solidFill>
                 <a:latin typeface="Arial"/>
               </a:rPr>
@@ -5586,8 +4851,8 @@
         </p:nvSpPr>
         <p:spPr>
           <a:xfrm>
-            <a:off x="594360" y="2980944"/>
-            <a:ext cx="11002975" cy="347472"/>
+            <a:off x="640080" y="2985516"/>
+            <a:ext cx="10911535" cy="731520"/>
           </a:xfrm>
           <a:prstGeom prst="rect">
             <a:avLst/>
@@ -5602,13 +4867,13 @@
           <a:p>
             <a:pPr algn="ctr"/>
             <a:r>
-              <a:rPr sz="2000" b="0" i="1">
-                <a:solidFill>
-                  <a:srgbClr val="8C8C8C"/>
+              <a:rPr sz="4800" b="1" i="0">
+                <a:solidFill>
+                  <a:srgbClr val="FFFFFF"/>
                 </a:solidFill>
                 <a:latin typeface="Arial"/>
               </a:rPr>
-              <a:t/>
+              <a:t>ただ主の    ためだけに</a:t>
             </a:r>
           </a:p>
         </p:txBody>
@@ -5621,8 +4886,8 @@
         </p:nvSpPr>
         <p:spPr>
           <a:xfrm>
-            <a:off x="594360" y="3529584"/>
-            <a:ext cx="11002975" cy="685800"/>
+            <a:off x="640080" y="3753612"/>
+            <a:ext cx="10911535" cy="365760"/>
           </a:xfrm>
           <a:prstGeom prst="rect">
             <a:avLst/>
@@ -5637,13 +4902,13 @@
           <a:p>
             <a:pPr algn="ctr"/>
             <a:r>
-              <a:rPr sz="4400" b="1" i="0">
-                <a:solidFill>
-                  <a:srgbClr val="FFFFFF"/>
+              <a:rPr sz="2400" b="0" i="1">
+                <a:solidFill>
+                  <a:srgbClr val="AAAAAA"/>
                 </a:solidFill>
                 <a:latin typeface="Arial"/>
               </a:rPr>
-              <a:t>ただ主の    ためだけに</a:t>
+              <a:t>tada shu no tame dake ni</a:t>
             </a:r>
           </a:p>
         </p:txBody>
@@ -5656,8 +4921,8 @@
         </p:nvSpPr>
         <p:spPr>
           <a:xfrm>
-            <a:off x="594360" y="4251960"/>
-            <a:ext cx="11002975" cy="384048"/>
+            <a:off x="640080" y="4530852"/>
+            <a:ext cx="10911535" cy="310896"/>
           </a:xfrm>
           <a:prstGeom prst="rect">
             <a:avLst/>
@@ -5672,13 +4937,13 @@
           <a:p>
             <a:pPr algn="ctr"/>
             <a:r>
-              <a:rPr sz="2400" b="0" i="1">
-                <a:solidFill>
-                  <a:srgbClr val="B4B4B4"/>
+              <a:rPr sz="2000" b="0" i="1">
+                <a:solidFill>
+                  <a:srgbClr val="828282"/>
                 </a:solidFill>
                 <a:latin typeface="Arial"/>
               </a:rPr>
-              <a:t>tada shu no tame dake ni</a:t>
+              <a:t>De Braços Bem Abertos</a:t>
             </a:r>
           </a:p>
         </p:txBody>
@@ -5691,8 +4956,8 @@
         </p:nvSpPr>
         <p:spPr>
           <a:xfrm>
-            <a:off x="594360" y="4672584"/>
-            <a:ext cx="11002975" cy="347472"/>
+            <a:off x="640080" y="4896612"/>
+            <a:ext cx="10911535" cy="310896"/>
           </a:xfrm>
           <a:prstGeom prst="rect">
             <a:avLst/>
@@ -5709,11 +4974,11 @@
             <a:r>
               <a:rPr sz="2000" b="0" i="1">
                 <a:solidFill>
-                  <a:srgbClr val="8C8C8C"/>
+                  <a:srgbClr val="828282"/>
                 </a:solidFill>
                 <a:latin typeface="Arial"/>
               </a:rPr>
-              <a:t/>
+              <a:t>Tome a minha vida, Eu te entrego</a:t>
             </a:r>
           </a:p>
         </p:txBody>
@@ -5752,8 +5017,8 @@
         </p:nvSpPr>
         <p:spPr>
           <a:xfrm>
-            <a:off x="594360" y="2258568"/>
-            <a:ext cx="11002975" cy="685800"/>
+            <a:off x="640080" y="2052828"/>
+            <a:ext cx="10911535" cy="731520"/>
           </a:xfrm>
           <a:prstGeom prst="rect">
             <a:avLst/>
@@ -5768,7 +5033,7 @@
           <a:p>
             <a:pPr algn="ctr"/>
             <a:r>
-              <a:rPr sz="3352" b="1" i="0">
+              <a:rPr sz="3600" b="1" i="0">
                 <a:solidFill>
                   <a:srgbClr val="FFFFFF"/>
                 </a:solidFill>
@@ -5787,8 +5052,8 @@
         </p:nvSpPr>
         <p:spPr>
           <a:xfrm>
-            <a:off x="594360" y="2980944"/>
-            <a:ext cx="11002975" cy="347472"/>
+            <a:off x="640080" y="2985516"/>
+            <a:ext cx="10911535" cy="731520"/>
           </a:xfrm>
           <a:prstGeom prst="rect">
             <a:avLst/>
@@ -5803,13 +5068,13 @@
           <a:p>
             <a:pPr algn="ctr"/>
             <a:r>
-              <a:rPr sz="2200" b="0" i="1">
-                <a:solidFill>
-                  <a:srgbClr val="8C8C8C"/>
+              <a:rPr sz="4100" b="1" i="0">
+                <a:solidFill>
+                  <a:srgbClr val="FFFFFF"/>
                 </a:solidFill>
                 <a:latin typeface="Arial"/>
               </a:rPr>
-              <a:t>主の前 に立ち 手を広げ</a:t>
+              <a:t>Tome as minhas mãos e as torne limpas</a:t>
             </a:r>
           </a:p>
         </p:txBody>
@@ -5822,8 +5087,8 @@
         </p:nvSpPr>
         <p:spPr>
           <a:xfrm>
-            <a:off x="594360" y="3529584"/>
-            <a:ext cx="11002975" cy="685800"/>
+            <a:off x="640080" y="4128516"/>
+            <a:ext cx="10911535" cy="310896"/>
           </a:xfrm>
           <a:prstGeom prst="rect">
             <a:avLst/>
@@ -5838,13 +5103,13 @@
           <a:p>
             <a:pPr algn="ctr"/>
             <a:r>
-              <a:rPr sz="3805" b="1" i="0">
-                <a:solidFill>
-                  <a:srgbClr val="FFFFFF"/>
+              <a:rPr sz="2000" b="0" i="0">
+                <a:solidFill>
+                  <a:srgbClr val="828282"/>
                 </a:solidFill>
                 <a:latin typeface="Arial"/>
               </a:rPr>
-              <a:t>Tome as minhas mãos e as torne limpas</a:t>
+              <a:t>主の前 に立ち 手を広げ</a:t>
             </a:r>
           </a:p>
         </p:txBody>
@@ -5857,8 +5122,8 @@
         </p:nvSpPr>
         <p:spPr>
           <a:xfrm>
-            <a:off x="594360" y="4251960"/>
-            <a:ext cx="11002975" cy="347472"/>
+            <a:off x="640080" y="4494276"/>
+            <a:ext cx="10911535" cy="310896"/>
           </a:xfrm>
           <a:prstGeom prst="rect">
             <a:avLst/>
@@ -5873,9 +5138,9 @@
           <a:p>
             <a:pPr algn="ctr"/>
             <a:r>
-              <a:rPr sz="2200" b="0" i="1">
-                <a:solidFill>
-                  <a:srgbClr val="8C8C8C"/>
+              <a:rPr sz="2000" b="0" i="0">
+                <a:solidFill>
+                  <a:srgbClr val="828282"/>
                 </a:solidFill>
                 <a:latin typeface="Arial"/>
               </a:rPr>
@@ -5918,8 +5183,8 @@
         </p:nvSpPr>
         <p:spPr>
           <a:xfrm>
-            <a:off x="594360" y="2258568"/>
-            <a:ext cx="11002975" cy="685800"/>
+            <a:off x="640080" y="2052828"/>
+            <a:ext cx="10911535" cy="731520"/>
           </a:xfrm>
           <a:prstGeom prst="rect">
             <a:avLst/>
@@ -5934,7 +5199,7 @@
           <a:p>
             <a:pPr algn="ctr"/>
             <a:r>
-              <a:rPr sz="4400" b="1" i="0">
+              <a:rPr sz="4800" b="1" i="0">
                 <a:solidFill>
                   <a:srgbClr val="FFFFFF"/>
                 </a:solidFill>
@@ -5953,8 +5218,8 @@
         </p:nvSpPr>
         <p:spPr>
           <a:xfrm>
-            <a:off x="594360" y="2980944"/>
-            <a:ext cx="11002975" cy="347472"/>
+            <a:off x="640080" y="2985516"/>
+            <a:ext cx="10911535" cy="731520"/>
           </a:xfrm>
           <a:prstGeom prst="rect">
             <a:avLst/>
@@ -5969,83 +5234,13 @@
           <a:p>
             <a:pPr algn="ctr"/>
             <a:r>
-              <a:rPr sz="2200" b="0" i="1">
-                <a:solidFill>
-                  <a:srgbClr val="8C8C8C"/>
-                </a:solidFill>
-                <a:latin typeface="Arial"/>
-              </a:rPr>
-              <a:t/>
-            </a:r>
-          </a:p>
-        </p:txBody>
-      </p:sp>
-      <p:sp>
-        <p:nvSpPr>
-          <p:cNvPr id="4" name="TextBox 3"/>
-          <p:cNvSpPr txBox="1"/>
-          <p:nvPr/>
-        </p:nvSpPr>
-        <p:spPr>
-          <a:xfrm>
-            <a:off x="594360" y="3529584"/>
-            <a:ext cx="11002975" cy="685800"/>
-          </a:xfrm>
-          <a:prstGeom prst="rect">
-            <a:avLst/>
-          </a:prstGeom>
-          <a:noFill/>
-        </p:spPr>
-        <p:txBody>
-          <a:bodyPr wrap="square">
-            <a:spAutoFit/>
-          </a:bodyPr>
-          <a:lstStyle/>
-          <a:p>
-            <a:pPr algn="ctr"/>
-            <a:r>
-              <a:rPr sz="2656" b="1" i="0">
+              <a:rPr sz="2800" b="1" i="0">
                 <a:solidFill>
                   <a:srgbClr val="FFFFFF"/>
                 </a:solidFill>
                 <a:latin typeface="Arial"/>
               </a:rPr>
               <a:t>Para que eu possa andar em tudo que você tem para mim</a:t>
-            </a:r>
-          </a:p>
-        </p:txBody>
-      </p:sp>
-      <p:sp>
-        <p:nvSpPr>
-          <p:cNvPr id="5" name="TextBox 4"/>
-          <p:cNvSpPr txBox="1"/>
-          <p:nvPr/>
-        </p:nvSpPr>
-        <p:spPr>
-          <a:xfrm>
-            <a:off x="594360" y="4251960"/>
-            <a:ext cx="11002975" cy="347472"/>
-          </a:xfrm>
-          <a:prstGeom prst="rect">
-            <a:avLst/>
-          </a:prstGeom>
-          <a:noFill/>
-        </p:spPr>
-        <p:txBody>
-          <a:bodyPr wrap="square">
-            <a:spAutoFit/>
-          </a:bodyPr>
-          <a:lstStyle/>
-          <a:p>
-            <a:pPr algn="ctr"/>
-            <a:r>
-              <a:rPr sz="2200" b="0" i="1">
-                <a:solidFill>
-                  <a:srgbClr val="8C8C8C"/>
-                </a:solidFill>
-                <a:latin typeface="Arial"/>
-              </a:rPr>
-              <a:t/>
             </a:r>
           </a:p>
         </p:txBody>
@@ -6084,8 +5279,8 @@
         </p:nvSpPr>
         <p:spPr>
           <a:xfrm>
-            <a:off x="594360" y="2258568"/>
-            <a:ext cx="11002975" cy="685800"/>
+            <a:off x="640080" y="2052828"/>
+            <a:ext cx="10911535" cy="731520"/>
           </a:xfrm>
           <a:prstGeom prst="rect">
             <a:avLst/>
@@ -6100,7 +5295,7 @@
           <a:p>
             <a:pPr algn="ctr"/>
             <a:r>
-              <a:rPr sz="4266" b="1" i="0">
+              <a:rPr sz="4600" b="1" i="0">
                 <a:solidFill>
                   <a:srgbClr val="FFFFFF"/>
                 </a:solidFill>
@@ -6119,8 +5314,8 @@
         </p:nvSpPr>
         <p:spPr>
           <a:xfrm>
-            <a:off x="594360" y="2980944"/>
-            <a:ext cx="11002975" cy="347472"/>
+            <a:off x="640080" y="2985516"/>
+            <a:ext cx="10911535" cy="731520"/>
           </a:xfrm>
           <a:prstGeom prst="rect">
             <a:avLst/>
@@ -6135,83 +5330,13 @@
           <a:p>
             <a:pPr algn="ctr"/>
             <a:r>
-              <a:rPr sz="2200" b="0" i="1">
-                <a:solidFill>
-                  <a:srgbClr val="8C8C8C"/>
-                </a:solidFill>
-                <a:latin typeface="Arial"/>
-              </a:rPr>
-              <a:t/>
-            </a:r>
-          </a:p>
-        </p:txBody>
-      </p:sp>
-      <p:sp>
-        <p:nvSpPr>
-          <p:cNvPr id="4" name="TextBox 3"/>
-          <p:cNvSpPr txBox="1"/>
-          <p:nvPr/>
-        </p:nvSpPr>
-        <p:spPr>
-          <a:xfrm>
-            <a:off x="594360" y="3529584"/>
-            <a:ext cx="11002975" cy="685800"/>
-          </a:xfrm>
-          <a:prstGeom prst="rect">
-            <a:avLst/>
-          </a:prstGeom>
-          <a:noFill/>
-        </p:spPr>
-        <p:txBody>
-          <a:bodyPr wrap="square">
-            <a:spAutoFit/>
-          </a:bodyPr>
-          <a:lstStyle/>
-          <a:p>
-            <a:pPr algn="ctr"/>
-            <a:r>
-              <a:rPr sz="3705" b="1" i="0">
+              <a:rPr sz="4000" b="1" i="0">
                 <a:solidFill>
                   <a:srgbClr val="FFFFFF"/>
                 </a:solidFill>
                 <a:latin typeface="Arial"/>
               </a:rPr>
               <a:t>Toda a minha vida é sua Eu te dou tudo</a:t>
-            </a:r>
-          </a:p>
-        </p:txBody>
-      </p:sp>
-      <p:sp>
-        <p:nvSpPr>
-          <p:cNvPr id="5" name="TextBox 4"/>
-          <p:cNvSpPr txBox="1"/>
-          <p:nvPr/>
-        </p:nvSpPr>
-        <p:spPr>
-          <a:xfrm>
-            <a:off x="594360" y="4251960"/>
-            <a:ext cx="11002975" cy="347472"/>
-          </a:xfrm>
-          <a:prstGeom prst="rect">
-            <a:avLst/>
-          </a:prstGeom>
-          <a:noFill/>
-        </p:spPr>
-        <p:txBody>
-          <a:bodyPr wrap="square">
-            <a:spAutoFit/>
-          </a:bodyPr>
-          <a:lstStyle/>
-          <a:p>
-            <a:pPr algn="ctr"/>
-            <a:r>
-              <a:rPr sz="2200" b="0" i="1">
-                <a:solidFill>
-                  <a:srgbClr val="8C8C8C"/>
-                </a:solidFill>
-                <a:latin typeface="Arial"/>
-              </a:rPr>
-              <a:t/>
             </a:r>
           </a:p>
         </p:txBody>
@@ -6250,8 +5375,8 @@
         </p:nvSpPr>
         <p:spPr>
           <a:xfrm>
-            <a:off x="594360" y="2258568"/>
-            <a:ext cx="11002975" cy="685800"/>
+            <a:off x="640080" y="2052828"/>
+            <a:ext cx="10911535" cy="731520"/>
           </a:xfrm>
           <a:prstGeom prst="rect">
             <a:avLst/>
@@ -6266,7 +5391,7 @@
           <a:p>
             <a:pPr algn="ctr"/>
             <a:r>
-              <a:rPr sz="4400" b="1" i="0">
+              <a:rPr sz="4800" b="1" i="0">
                 <a:solidFill>
                   <a:srgbClr val="FFFFFF"/>
                 </a:solidFill>
@@ -6285,8 +5410,8 @@
         </p:nvSpPr>
         <p:spPr>
           <a:xfrm>
-            <a:off x="594360" y="2980944"/>
-            <a:ext cx="11002975" cy="347472"/>
+            <a:off x="640080" y="2985516"/>
+            <a:ext cx="10911535" cy="731520"/>
           </a:xfrm>
           <a:prstGeom prst="rect">
             <a:avLst/>
@@ -6301,83 +5426,13 @@
           <a:p>
             <a:pPr algn="ctr"/>
             <a:r>
-              <a:rPr sz="2200" b="0" i="1">
-                <a:solidFill>
-                  <a:srgbClr val="8C8C8C"/>
-                </a:solidFill>
-                <a:latin typeface="Arial"/>
-              </a:rPr>
-              <a:t/>
-            </a:r>
-          </a:p>
-        </p:txBody>
-      </p:sp>
-      <p:sp>
-        <p:nvSpPr>
-          <p:cNvPr id="4" name="TextBox 3"/>
-          <p:cNvSpPr txBox="1"/>
-          <p:nvPr/>
-        </p:nvSpPr>
-        <p:spPr>
-          <a:xfrm>
-            <a:off x="594360" y="3529584"/>
-            <a:ext cx="11002975" cy="685800"/>
-          </a:xfrm>
-          <a:prstGeom prst="rect">
-            <a:avLst/>
-          </a:prstGeom>
-          <a:noFill/>
-        </p:spPr>
-        <p:txBody>
-          <a:bodyPr wrap="square">
-            <a:spAutoFit/>
-          </a:bodyPr>
-          <a:lstStyle/>
-          <a:p>
-            <a:pPr algn="ctr"/>
-            <a:r>
-              <a:rPr sz="4266" b="1" i="0">
+              <a:rPr sz="4600" b="1" i="0">
                 <a:solidFill>
                   <a:srgbClr val="FFFFFF"/>
                 </a:solidFill>
                 <a:latin typeface="Arial"/>
               </a:rPr>
               <a:t>Oh, eu sou Teu e Tu és meu, Jesus</a:t>
-            </a:r>
-          </a:p>
-        </p:txBody>
-      </p:sp>
-      <p:sp>
-        <p:nvSpPr>
-          <p:cNvPr id="5" name="TextBox 4"/>
-          <p:cNvSpPr txBox="1"/>
-          <p:nvPr/>
-        </p:nvSpPr>
-        <p:spPr>
-          <a:xfrm>
-            <a:off x="594360" y="4251960"/>
-            <a:ext cx="11002975" cy="347472"/>
-          </a:xfrm>
-          <a:prstGeom prst="rect">
-            <a:avLst/>
-          </a:prstGeom>
-          <a:noFill/>
-        </p:spPr>
-        <p:txBody>
-          <a:bodyPr wrap="square">
-            <a:spAutoFit/>
-          </a:bodyPr>
-          <a:lstStyle/>
-          <a:p>
-            <a:pPr algn="ctr"/>
-            <a:r>
-              <a:rPr sz="2200" b="0" i="1">
-                <a:solidFill>
-                  <a:srgbClr val="8C8C8C"/>
-                </a:solidFill>
-                <a:latin typeface="Arial"/>
-              </a:rPr>
-              <a:t/>
             </a:r>
           </a:p>
         </p:txBody>

--- a/output_pptx/Arms_Open_Wide.pptx
+++ b/output_pptx/Arms_Open_Wide.pptx
@@ -3184,6 +3184,76 @@
           </a:p>
         </p:txBody>
       </p:sp>
+      <p:sp>
+        <p:nvSpPr>
+          <p:cNvPr id="4" name="TextBox 3"/>
+          <p:cNvSpPr txBox="1"/>
+          <p:nvPr/>
+        </p:nvSpPr>
+        <p:spPr>
+          <a:xfrm>
+            <a:off x="640080" y="4128516"/>
+            <a:ext cx="10911535" cy="310896"/>
+          </a:xfrm>
+          <a:prstGeom prst="rect">
+            <a:avLst/>
+          </a:prstGeom>
+          <a:noFill/>
+        </p:spPr>
+        <p:txBody>
+          <a:bodyPr wrap="square">
+            <a:spAutoFit/>
+          </a:bodyPr>
+          <a:lstStyle/>
+          <a:p>
+            <a:pPr algn="ctr"/>
+            <a:r>
+              <a:rPr sz="2000" b="0" i="0">
+                <a:solidFill>
+                  <a:srgbClr val="828282"/>
+                </a:solidFill>
+                <a:latin typeface="Arial"/>
+              </a:rPr>
+              <a:t>腕を大きく開いて</a:t>
+            </a:r>
+          </a:p>
+        </p:txBody>
+      </p:sp>
+      <p:sp>
+        <p:nvSpPr>
+          <p:cNvPr id="5" name="TextBox 4"/>
+          <p:cNvSpPr txBox="1"/>
+          <p:nvPr/>
+        </p:nvSpPr>
+        <p:spPr>
+          <a:xfrm>
+            <a:off x="640080" y="4494276"/>
+            <a:ext cx="10911535" cy="310896"/>
+          </a:xfrm>
+          <a:prstGeom prst="rect">
+            <a:avLst/>
+          </a:prstGeom>
+          <a:noFill/>
+        </p:spPr>
+        <p:txBody>
+          <a:bodyPr wrap="square">
+            <a:spAutoFit/>
+          </a:bodyPr>
+          <a:lstStyle/>
+          <a:p>
+            <a:pPr algn="ctr"/>
+            <a:r>
+              <a:rPr sz="2000" b="0" i="0">
+                <a:solidFill>
+                  <a:srgbClr val="828282"/>
+                </a:solidFill>
+                <a:latin typeface="Arial"/>
+              </a:rPr>
+              <a:t>私の人生を取ってください、私はあなたに委ねます</a:t>
+            </a:r>
+          </a:p>
+        </p:txBody>
+      </p:sp>
     </p:spTree>
   </p:cSld>
   <p:clrMapOvr>
@@ -3280,6 +3350,76 @@
           </a:p>
         </p:txBody>
       </p:sp>
+      <p:sp>
+        <p:nvSpPr>
+          <p:cNvPr id="4" name="TextBox 3"/>
+          <p:cNvSpPr txBox="1"/>
+          <p:nvPr/>
+        </p:nvSpPr>
+        <p:spPr>
+          <a:xfrm>
+            <a:off x="640080" y="4128516"/>
+            <a:ext cx="10911535" cy="310896"/>
+          </a:xfrm>
+          <a:prstGeom prst="rect">
+            <a:avLst/>
+          </a:prstGeom>
+          <a:noFill/>
+        </p:spPr>
+        <p:txBody>
+          <a:bodyPr wrap="square">
+            <a:spAutoFit/>
+          </a:bodyPr>
+          <a:lstStyle/>
+          <a:p>
+            <a:pPr algn="ctr"/>
+            <a:r>
+              <a:rPr sz="2000" b="0" i="0">
+                <a:solidFill>
+                  <a:srgbClr val="828282"/>
+                </a:solidFill>
+                <a:latin typeface="Arial"/>
+              </a:rPr>
+              <a:t>私の瞬間と私の日々を取ってください</a:t>
+            </a:r>
+          </a:p>
+        </p:txBody>
+      </p:sp>
+      <p:sp>
+        <p:nvSpPr>
+          <p:cNvPr id="5" name="TextBox 4"/>
+          <p:cNvSpPr txBox="1"/>
+          <p:nvPr/>
+        </p:nvSpPr>
+        <p:spPr>
+          <a:xfrm>
+            <a:off x="640080" y="4494276"/>
+            <a:ext cx="10911535" cy="310896"/>
+          </a:xfrm>
+          <a:prstGeom prst="rect">
+            <a:avLst/>
+          </a:prstGeom>
+          <a:noFill/>
+        </p:spPr>
+        <p:txBody>
+          <a:bodyPr wrap="square">
+            <a:spAutoFit/>
+          </a:bodyPr>
+          <a:lstStyle/>
+          <a:p>
+            <a:pPr algn="ctr"/>
+            <a:r>
+              <a:rPr sz="2000" b="0" i="0">
+                <a:solidFill>
+                  <a:srgbClr val="828282"/>
+                </a:solidFill>
+                <a:latin typeface="Arial"/>
+              </a:rPr>
+              <a:t>私が吸うこの空気を許しましょう</a:t>
+            </a:r>
+          </a:p>
+        </p:txBody>
+      </p:sp>
     </p:spTree>
   </p:cSld>
   <p:clrMapOvr>
@@ -3376,6 +3516,76 @@
           </a:p>
         </p:txBody>
       </p:sp>
+      <p:sp>
+        <p:nvSpPr>
+          <p:cNvPr id="4" name="TextBox 3"/>
+          <p:cNvSpPr txBox="1"/>
+          <p:nvPr/>
+        </p:nvSpPr>
+        <p:spPr>
+          <a:xfrm>
+            <a:off x="640080" y="4128516"/>
+            <a:ext cx="10911535" cy="310896"/>
+          </a:xfrm>
+          <a:prstGeom prst="rect">
+            <a:avLst/>
+          </a:prstGeom>
+          <a:noFill/>
+        </p:spPr>
+        <p:txBody>
+          <a:bodyPr wrap="square">
+            <a:spAutoFit/>
+          </a:bodyPr>
+          <a:lstStyle/>
+          <a:p>
+            <a:pPr algn="ctr"/>
+            <a:r>
+              <a:rPr sz="2000" b="0" i="0">
+                <a:solidFill>
+                  <a:srgbClr val="828282"/>
+                </a:solidFill>
+                <a:latin typeface="Arial"/>
+              </a:rPr>
+              <a:t>あなたの御名に降伏して</a:t>
+            </a:r>
+          </a:p>
+        </p:txBody>
+      </p:sp>
+      <p:sp>
+        <p:nvSpPr>
+          <p:cNvPr id="5" name="TextBox 4"/>
+          <p:cNvSpPr txBox="1"/>
+          <p:nvPr/>
+        </p:nvSpPr>
+        <p:spPr>
+          <a:xfrm>
+            <a:off x="640080" y="4494276"/>
+            <a:ext cx="10911535" cy="310896"/>
+          </a:xfrm>
+          <a:prstGeom prst="rect">
+            <a:avLst/>
+          </a:prstGeom>
+          <a:noFill/>
+        </p:spPr>
+        <p:txBody>
+          <a:bodyPr wrap="square">
+            <a:spAutoFit/>
+          </a:bodyPr>
+          <a:lstStyle/>
+          <a:p>
+            <a:pPr algn="ctr"/>
+            <a:r>
+              <a:rPr sz="2000" b="0" i="0">
+                <a:solidFill>
+                  <a:srgbClr val="828282"/>
+                </a:solidFill>
+                <a:latin typeface="Arial"/>
+              </a:rPr>
+              <a:t>そして永遠に祈ります</a:t>
+            </a:r>
+          </a:p>
+        </p:txBody>
+      </p:sp>
     </p:spTree>
   </p:cSld>
   <p:clrMapOvr>
@@ -3472,6 +3682,76 @@
           </a:p>
         </p:txBody>
       </p:sp>
+      <p:sp>
+        <p:nvSpPr>
+          <p:cNvPr id="4" name="TextBox 3"/>
+          <p:cNvSpPr txBox="1"/>
+          <p:nvPr/>
+        </p:nvSpPr>
+        <p:spPr>
+          <a:xfrm>
+            <a:off x="640080" y="4128516"/>
+            <a:ext cx="10911535" cy="310896"/>
+          </a:xfrm>
+          <a:prstGeom prst="rect">
+            <a:avLst/>
+          </a:prstGeom>
+          <a:noFill/>
+        </p:spPr>
+        <p:txBody>
+          <a:bodyPr wrap="square">
+            <a:spAutoFit/>
+          </a:bodyPr>
+          <a:lstStyle/>
+          <a:p>
+            <a:pPr algn="ctr"/>
+            <a:r>
+              <a:rPr sz="2000" b="0" i="0">
+                <a:solidFill>
+                  <a:srgbClr val="828282"/>
+                </a:solidFill>
+                <a:latin typeface="Arial"/>
+              </a:rPr>
+              <a:t>あなたの道を進んでください、あなたの道を進んでください</a:t>
+            </a:r>
+          </a:p>
+        </p:txBody>
+      </p:sp>
+      <p:sp>
+        <p:nvSpPr>
+          <p:cNvPr id="5" name="TextBox 4"/>
+          <p:cNvSpPr txBox="1"/>
+          <p:nvPr/>
+        </p:nvSpPr>
+        <p:spPr>
+          <a:xfrm>
+            <a:off x="640080" y="4494276"/>
+            <a:ext cx="10911535" cy="310896"/>
+          </a:xfrm>
+          <a:prstGeom prst="rect">
+            <a:avLst/>
+          </a:prstGeom>
+          <a:noFill/>
+        </p:spPr>
+        <p:txBody>
+          <a:bodyPr wrap="square">
+            <a:spAutoFit/>
+          </a:bodyPr>
+          <a:lstStyle/>
+          <a:p>
+            <a:pPr algn="ctr"/>
+            <a:r>
+              <a:rPr sz="2000" b="0" i="0">
+                <a:solidFill>
+                  <a:srgbClr val="828282"/>
+                </a:solidFill>
+                <a:latin typeface="Arial"/>
+              </a:rPr>
+              <a:t>あなたの御名に降伏して</a:t>
+            </a:r>
+          </a:p>
+        </p:txBody>
+      </p:sp>
     </p:spTree>
   </p:cSld>
   <p:clrMapOvr>
@@ -3734,6 +4014,76 @@
           </a:p>
         </p:txBody>
       </p:sp>
+      <p:sp>
+        <p:nvSpPr>
+          <p:cNvPr id="4" name="TextBox 3"/>
+          <p:cNvSpPr txBox="1"/>
+          <p:nvPr/>
+        </p:nvSpPr>
+        <p:spPr>
+          <a:xfrm>
+            <a:off x="640080" y="4128516"/>
+            <a:ext cx="10911535" cy="310896"/>
+          </a:xfrm>
+          <a:prstGeom prst="rect">
+            <a:avLst/>
+          </a:prstGeom>
+          <a:noFill/>
+        </p:spPr>
+        <p:txBody>
+          <a:bodyPr wrap="square">
+            <a:spAutoFit/>
+          </a:bodyPr>
+          <a:lstStyle/>
+          <a:p>
+            <a:pPr algn="ctr"/>
+            <a:r>
+              <a:rPr sz="2000" b="0" i="0">
+                <a:solidFill>
+                  <a:srgbClr val="828282"/>
+                </a:solidFill>
+                <a:latin typeface="Arial"/>
+              </a:rPr>
+              <a:t>私の心を清潔に保ってください</a:t>
+            </a:r>
+          </a:p>
+        </p:txBody>
+      </p:sp>
+      <p:sp>
+        <p:nvSpPr>
+          <p:cNvPr id="5" name="TextBox 4"/>
+          <p:cNvSpPr txBox="1"/>
+          <p:nvPr/>
+        </p:nvSpPr>
+        <p:spPr>
+          <a:xfrm>
+            <a:off x="640080" y="4494276"/>
+            <a:ext cx="10911535" cy="310896"/>
+          </a:xfrm>
+          <a:prstGeom prst="rect">
+            <a:avLst/>
+          </a:prstGeom>
+          <a:noFill/>
+        </p:spPr>
+        <p:txBody>
+          <a:bodyPr wrap="square">
+            <a:spAutoFit/>
+          </a:bodyPr>
+          <a:lstStyle/>
+          <a:p>
+            <a:pPr algn="ctr"/>
+            <a:r>
+              <a:rPr sz="2000" b="0" i="0">
+                <a:solidFill>
+                  <a:srgbClr val="828282"/>
+                </a:solidFill>
+                <a:latin typeface="Arial"/>
+              </a:rPr>
+              <a:t>あなたが私のために持っているすべてのことの中を歩むことができるように</a:t>
+            </a:r>
+          </a:p>
+        </p:txBody>
+      </p:sp>
     </p:spTree>
   </p:cSld>
   <p:clrMapOvr>
@@ -3830,6 +4180,76 @@
           </a:p>
         </p:txBody>
       </p:sp>
+      <p:sp>
+        <p:nvSpPr>
+          <p:cNvPr id="4" name="TextBox 3"/>
+          <p:cNvSpPr txBox="1"/>
+          <p:nvPr/>
+        </p:nvSpPr>
+        <p:spPr>
+          <a:xfrm>
+            <a:off x="640080" y="4128516"/>
+            <a:ext cx="10911535" cy="310896"/>
+          </a:xfrm>
+          <a:prstGeom prst="rect">
+            <a:avLst/>
+          </a:prstGeom>
+          <a:noFill/>
+        </p:spPr>
+        <p:txBody>
+          <a:bodyPr wrap="square">
+            <a:spAutoFit/>
+          </a:bodyPr>
+          <a:lstStyle/>
+          <a:p>
+            <a:pPr algn="ctr"/>
+            <a:r>
+              <a:rPr sz="2000" b="0" i="0">
+                <a:solidFill>
+                  <a:srgbClr val="828282"/>
+                </a:solidFill>
+                <a:latin typeface="Arial"/>
+              </a:rPr>
+              <a:t>いつもあなただけのために、神よ</a:t>
+            </a:r>
+          </a:p>
+        </p:txBody>
+      </p:sp>
+      <p:sp>
+        <p:nvSpPr>
+          <p:cNvPr id="5" name="TextBox 4"/>
+          <p:cNvSpPr txBox="1"/>
+          <p:nvPr/>
+        </p:nvSpPr>
+        <p:spPr>
+          <a:xfrm>
+            <a:off x="640080" y="4494276"/>
+            <a:ext cx="10911535" cy="310896"/>
+          </a:xfrm>
+          <a:prstGeom prst="rect">
+            <a:avLst/>
+          </a:prstGeom>
+          <a:noFill/>
+        </p:spPr>
+        <p:txBody>
+          <a:bodyPr wrap="square">
+            <a:spAutoFit/>
+          </a:bodyPr>
+          <a:lstStyle/>
+          <a:p>
+            <a:pPr algn="ctr"/>
+            <a:r>
+              <a:rPr sz="2000" b="0" i="0">
+                <a:solidFill>
+                  <a:srgbClr val="828282"/>
+                </a:solidFill>
+                <a:latin typeface="Arial"/>
+              </a:rPr>
+              <a:t>私の人生のすべてはあなたのものです、すべてをあなたに与えます</a:t>
+            </a:r>
+          </a:p>
+        </p:txBody>
+      </p:sp>
     </p:spTree>
   </p:cSld>
   <p:clrMapOvr>
@@ -3926,6 +4346,76 @@
           </a:p>
         </p:txBody>
       </p:sp>
+      <p:sp>
+        <p:nvSpPr>
+          <p:cNvPr id="4" name="TextBox 3"/>
+          <p:cNvSpPr txBox="1"/>
+          <p:nvPr/>
+        </p:nvSpPr>
+        <p:spPr>
+          <a:xfrm>
+            <a:off x="640080" y="4128516"/>
+            <a:ext cx="10911535" cy="310896"/>
+          </a:xfrm>
+          <a:prstGeom prst="rect">
+            <a:avLst/>
+          </a:prstGeom>
+          <a:noFill/>
+        </p:spPr>
+        <p:txBody>
+          <a:bodyPr wrap="square">
+            <a:spAutoFit/>
+          </a:bodyPr>
+          <a:lstStyle/>
+          <a:p>
+            <a:pPr algn="ctr"/>
+            <a:r>
+              <a:rPr sz="2000" b="0" i="0">
+                <a:solidFill>
+                  <a:srgbClr val="828282"/>
+                </a:solidFill>
+                <a:latin typeface="Arial"/>
+              </a:rPr>
+              <a:t>ああ、ここに腕を開いて立っています</a:t>
+            </a:r>
+          </a:p>
+        </p:txBody>
+      </p:sp>
+      <p:sp>
+        <p:nvSpPr>
+          <p:cNvPr id="5" name="TextBox 4"/>
+          <p:cNvSpPr txBox="1"/>
+          <p:nvPr/>
+        </p:nvSpPr>
+        <p:spPr>
+          <a:xfrm>
+            <a:off x="640080" y="4494276"/>
+            <a:ext cx="10911535" cy="310896"/>
+          </a:xfrm>
+          <a:prstGeom prst="rect">
+            <a:avLst/>
+          </a:prstGeom>
+          <a:noFill/>
+        </p:spPr>
+        <p:txBody>
+          <a:bodyPr wrap="square">
+            <a:spAutoFit/>
+          </a:bodyPr>
+          <a:lstStyle/>
+          <a:p>
+            <a:pPr algn="ctr"/>
+            <a:r>
+              <a:rPr sz="2000" b="0" i="0">
+                <a:solidFill>
+                  <a:srgbClr val="828282"/>
+                </a:solidFill>
+                <a:latin typeface="Arial"/>
+              </a:rPr>
+              <a:t>ああ、私はあなたのもの、そしてあなたは私のもの、イエス</a:t>
+            </a:r>
+          </a:p>
+        </p:txBody>
+      </p:sp>
     </p:spTree>
   </p:cSld>
   <p:clrMapOvr>
@@ -4022,6 +4512,76 @@
           </a:p>
         </p:txBody>
       </p:sp>
+      <p:sp>
+        <p:nvSpPr>
+          <p:cNvPr id="4" name="TextBox 3"/>
+          <p:cNvSpPr txBox="1"/>
+          <p:nvPr/>
+        </p:nvSpPr>
+        <p:spPr>
+          <a:xfrm>
+            <a:off x="640080" y="4128516"/>
+            <a:ext cx="10911535" cy="310896"/>
+          </a:xfrm>
+          <a:prstGeom prst="rect">
+            <a:avLst/>
+          </a:prstGeom>
+          <a:noFill/>
+        </p:spPr>
+        <p:txBody>
+          <a:bodyPr wrap="square">
+            <a:spAutoFit/>
+          </a:bodyPr>
+          <a:lstStyle/>
+          <a:p>
+            <a:pPr algn="ctr"/>
+            <a:r>
+              <a:rPr sz="2000" b="0" i="0">
+                <a:solidFill>
+                  <a:srgbClr val="828282"/>
+                </a:solidFill>
+                <a:latin typeface="Arial"/>
+              </a:rPr>
+              <a:t>私の瞬間と私の日々を取ってください</a:t>
+            </a:r>
+          </a:p>
+        </p:txBody>
+      </p:sp>
+      <p:sp>
+        <p:nvSpPr>
+          <p:cNvPr id="5" name="TextBox 4"/>
+          <p:cNvSpPr txBox="1"/>
+          <p:nvPr/>
+        </p:nvSpPr>
+        <p:spPr>
+          <a:xfrm>
+            <a:off x="640080" y="4494276"/>
+            <a:ext cx="10911535" cy="310896"/>
+          </a:xfrm>
+          <a:prstGeom prst="rect">
+            <a:avLst/>
+          </a:prstGeom>
+          <a:noFill/>
+        </p:spPr>
+        <p:txBody>
+          <a:bodyPr wrap="square">
+            <a:spAutoFit/>
+          </a:bodyPr>
+          <a:lstStyle/>
+          <a:p>
+            <a:pPr algn="ctr"/>
+            <a:r>
+              <a:rPr sz="2000" b="0" i="0">
+                <a:solidFill>
+                  <a:srgbClr val="828282"/>
+                </a:solidFill>
+                <a:latin typeface="Arial"/>
+              </a:rPr>
+              <a:t>私が吸うこの空気を許しましょう</a:t>
+            </a:r>
+          </a:p>
+        </p:txBody>
+      </p:sp>
     </p:spTree>
   </p:cSld>
   <p:clrMapOvr>
@@ -4118,6 +4678,76 @@
           </a:p>
         </p:txBody>
       </p:sp>
+      <p:sp>
+        <p:nvSpPr>
+          <p:cNvPr id="4" name="TextBox 3"/>
+          <p:cNvSpPr txBox="1"/>
+          <p:nvPr/>
+        </p:nvSpPr>
+        <p:spPr>
+          <a:xfrm>
+            <a:off x="640080" y="4128516"/>
+            <a:ext cx="10911535" cy="310896"/>
+          </a:xfrm>
+          <a:prstGeom prst="rect">
+            <a:avLst/>
+          </a:prstGeom>
+          <a:noFill/>
+        </p:spPr>
+        <p:txBody>
+          <a:bodyPr wrap="square">
+            <a:spAutoFit/>
+          </a:bodyPr>
+          <a:lstStyle/>
+          <a:p>
+            <a:pPr algn="ctr"/>
+            <a:r>
+              <a:rPr sz="2000" b="0" i="0">
+                <a:solidFill>
+                  <a:srgbClr val="828282"/>
+                </a:solidFill>
+                <a:latin typeface="Arial"/>
+              </a:rPr>
+              <a:t>あなたの御名に降伏して</a:t>
+            </a:r>
+          </a:p>
+        </p:txBody>
+      </p:sp>
+      <p:sp>
+        <p:nvSpPr>
+          <p:cNvPr id="5" name="TextBox 4"/>
+          <p:cNvSpPr txBox="1"/>
+          <p:nvPr/>
+        </p:nvSpPr>
+        <p:spPr>
+          <a:xfrm>
+            <a:off x="640080" y="4494276"/>
+            <a:ext cx="10911535" cy="310896"/>
+          </a:xfrm>
+          <a:prstGeom prst="rect">
+            <a:avLst/>
+          </a:prstGeom>
+          <a:noFill/>
+        </p:spPr>
+        <p:txBody>
+          <a:bodyPr wrap="square">
+            <a:spAutoFit/>
+          </a:bodyPr>
+          <a:lstStyle/>
+          <a:p>
+            <a:pPr algn="ctr"/>
+            <a:r>
+              <a:rPr sz="2000" b="0" i="0">
+                <a:solidFill>
+                  <a:srgbClr val="828282"/>
+                </a:solidFill>
+                <a:latin typeface="Arial"/>
+              </a:rPr>
+              <a:t>そして永遠に祈ります</a:t>
+            </a:r>
+          </a:p>
+        </p:txBody>
+      </p:sp>
     </p:spTree>
   </p:cSld>
   <p:clrMapOvr>
@@ -4214,6 +4844,76 @@
           </a:p>
         </p:txBody>
       </p:sp>
+      <p:sp>
+        <p:nvSpPr>
+          <p:cNvPr id="4" name="TextBox 3"/>
+          <p:cNvSpPr txBox="1"/>
+          <p:nvPr/>
+        </p:nvSpPr>
+        <p:spPr>
+          <a:xfrm>
+            <a:off x="640080" y="4128516"/>
+            <a:ext cx="10911535" cy="310896"/>
+          </a:xfrm>
+          <a:prstGeom prst="rect">
+            <a:avLst/>
+          </a:prstGeom>
+          <a:noFill/>
+        </p:spPr>
+        <p:txBody>
+          <a:bodyPr wrap="square">
+            <a:spAutoFit/>
+          </a:bodyPr>
+          <a:lstStyle/>
+          <a:p>
+            <a:pPr algn="ctr"/>
+            <a:r>
+              <a:rPr sz="2000" b="0" i="0">
+                <a:solidFill>
+                  <a:srgbClr val="828282"/>
+                </a:solidFill>
+                <a:latin typeface="Arial"/>
+              </a:rPr>
+              <a:t>あなたの道を進んでください、あなたの道を進んでください</a:t>
+            </a:r>
+          </a:p>
+        </p:txBody>
+      </p:sp>
+      <p:sp>
+        <p:nvSpPr>
+          <p:cNvPr id="5" name="TextBox 4"/>
+          <p:cNvSpPr txBox="1"/>
+          <p:nvPr/>
+        </p:nvSpPr>
+        <p:spPr>
+          <a:xfrm>
+            <a:off x="640080" y="4494276"/>
+            <a:ext cx="10911535" cy="310896"/>
+          </a:xfrm>
+          <a:prstGeom prst="rect">
+            <a:avLst/>
+          </a:prstGeom>
+          <a:noFill/>
+        </p:spPr>
+        <p:txBody>
+          <a:bodyPr wrap="square">
+            <a:spAutoFit/>
+          </a:bodyPr>
+          <a:lstStyle/>
+          <a:p>
+            <a:pPr algn="ctr"/>
+            <a:r>
+              <a:rPr sz="2000" b="0" i="0">
+                <a:solidFill>
+                  <a:srgbClr val="828282"/>
+                </a:solidFill>
+                <a:latin typeface="Arial"/>
+              </a:rPr>
+              <a:t>あなたの御名に降伏して</a:t>
+            </a:r>
+          </a:p>
+        </p:txBody>
+      </p:sp>
     </p:spTree>
   </p:cSld>
   <p:clrMapOvr>
@@ -4275,6 +4975,41 @@
           </a:p>
         </p:txBody>
       </p:sp>
+      <p:sp>
+        <p:nvSpPr>
+          <p:cNvPr id="3" name="TextBox 2"/>
+          <p:cNvSpPr txBox="1"/>
+          <p:nvPr/>
+        </p:nvSpPr>
+        <p:spPr>
+          <a:xfrm>
+            <a:off x="640080" y="3845052"/>
+            <a:ext cx="10911535" cy="310896"/>
+          </a:xfrm>
+          <a:prstGeom prst="rect">
+            <a:avLst/>
+          </a:prstGeom>
+          <a:noFill/>
+        </p:spPr>
+        <p:txBody>
+          <a:bodyPr wrap="square">
+            <a:spAutoFit/>
+          </a:bodyPr>
+          <a:lstStyle/>
+          <a:p>
+            <a:pPr algn="ctr"/>
+            <a:r>
+              <a:rPr sz="2000" b="0" i="0">
+                <a:solidFill>
+                  <a:srgbClr val="828282"/>
+                </a:solidFill>
+                <a:latin typeface="Arial"/>
+              </a:rPr>
+              <a:t>十字架の上で、私は自分を見つけます</a:t>
+            </a:r>
+          </a:p>
+        </p:txBody>
+      </p:sp>
     </p:spTree>
   </p:cSld>
   <p:clrMapOvr>
@@ -5245,6 +5980,76 @@
           </a:p>
         </p:txBody>
       </p:sp>
+      <p:sp>
+        <p:nvSpPr>
+          <p:cNvPr id="4" name="TextBox 3"/>
+          <p:cNvSpPr txBox="1"/>
+          <p:nvPr/>
+        </p:nvSpPr>
+        <p:spPr>
+          <a:xfrm>
+            <a:off x="640080" y="4128516"/>
+            <a:ext cx="10911535" cy="310896"/>
+          </a:xfrm>
+          <a:prstGeom prst="rect">
+            <a:avLst/>
+          </a:prstGeom>
+          <a:noFill/>
+        </p:spPr>
+        <p:txBody>
+          <a:bodyPr wrap="square">
+            <a:spAutoFit/>
+          </a:bodyPr>
+          <a:lstStyle/>
+          <a:p>
+            <a:pPr algn="ctr"/>
+            <a:r>
+              <a:rPr sz="2000" b="0" i="0">
+                <a:solidFill>
+                  <a:srgbClr val="828282"/>
+                </a:solidFill>
+                <a:latin typeface="Arial"/>
+              </a:rPr>
+              <a:t>私の心を清潔に保ってください</a:t>
+            </a:r>
+          </a:p>
+        </p:txBody>
+      </p:sp>
+      <p:sp>
+        <p:nvSpPr>
+          <p:cNvPr id="5" name="TextBox 4"/>
+          <p:cNvSpPr txBox="1"/>
+          <p:nvPr/>
+        </p:nvSpPr>
+        <p:spPr>
+          <a:xfrm>
+            <a:off x="640080" y="4494276"/>
+            <a:ext cx="10911535" cy="310896"/>
+          </a:xfrm>
+          <a:prstGeom prst="rect">
+            <a:avLst/>
+          </a:prstGeom>
+          <a:noFill/>
+        </p:spPr>
+        <p:txBody>
+          <a:bodyPr wrap="square">
+            <a:spAutoFit/>
+          </a:bodyPr>
+          <a:lstStyle/>
+          <a:p>
+            <a:pPr algn="ctr"/>
+            <a:r>
+              <a:rPr sz="2000" b="0" i="0">
+                <a:solidFill>
+                  <a:srgbClr val="828282"/>
+                </a:solidFill>
+                <a:latin typeface="Arial"/>
+              </a:rPr>
+              <a:t>あなたが私のために持っているすべてのことの中を歩むことができるように</a:t>
+            </a:r>
+          </a:p>
+        </p:txBody>
+      </p:sp>
     </p:spTree>
   </p:cSld>
   <p:clrMapOvr>
@@ -5341,6 +6146,76 @@
           </a:p>
         </p:txBody>
       </p:sp>
+      <p:sp>
+        <p:nvSpPr>
+          <p:cNvPr id="4" name="TextBox 3"/>
+          <p:cNvSpPr txBox="1"/>
+          <p:nvPr/>
+        </p:nvSpPr>
+        <p:spPr>
+          <a:xfrm>
+            <a:off x="640080" y="4128516"/>
+            <a:ext cx="10911535" cy="310896"/>
+          </a:xfrm>
+          <a:prstGeom prst="rect">
+            <a:avLst/>
+          </a:prstGeom>
+          <a:noFill/>
+        </p:spPr>
+        <p:txBody>
+          <a:bodyPr wrap="square">
+            <a:spAutoFit/>
+          </a:bodyPr>
+          <a:lstStyle/>
+          <a:p>
+            <a:pPr algn="ctr"/>
+            <a:r>
+              <a:rPr sz="2000" b="0" i="0">
+                <a:solidFill>
+                  <a:srgbClr val="828282"/>
+                </a:solidFill>
+                <a:latin typeface="Arial"/>
+              </a:rPr>
+              <a:t>いつもあなただけのために、神よ</a:t>
+            </a:r>
+          </a:p>
+        </p:txBody>
+      </p:sp>
+      <p:sp>
+        <p:nvSpPr>
+          <p:cNvPr id="5" name="TextBox 4"/>
+          <p:cNvSpPr txBox="1"/>
+          <p:nvPr/>
+        </p:nvSpPr>
+        <p:spPr>
+          <a:xfrm>
+            <a:off x="640080" y="4494276"/>
+            <a:ext cx="10911535" cy="310896"/>
+          </a:xfrm>
+          <a:prstGeom prst="rect">
+            <a:avLst/>
+          </a:prstGeom>
+          <a:noFill/>
+        </p:spPr>
+        <p:txBody>
+          <a:bodyPr wrap="square">
+            <a:spAutoFit/>
+          </a:bodyPr>
+          <a:lstStyle/>
+          <a:p>
+            <a:pPr algn="ctr"/>
+            <a:r>
+              <a:rPr sz="2000" b="0" i="0">
+                <a:solidFill>
+                  <a:srgbClr val="828282"/>
+                </a:solidFill>
+                <a:latin typeface="Arial"/>
+              </a:rPr>
+              <a:t>私の人生のすべてはあなたのものです、すべてをあなたに与えます</a:t>
+            </a:r>
+          </a:p>
+        </p:txBody>
+      </p:sp>
     </p:spTree>
   </p:cSld>
   <p:clrMapOvr>
@@ -5433,6 +6308,76 @@
                 <a:latin typeface="Arial"/>
               </a:rPr>
               <a:t>Oh, eu sou Teu e Tu és meu, Jesus</a:t>
+            </a:r>
+          </a:p>
+        </p:txBody>
+      </p:sp>
+      <p:sp>
+        <p:nvSpPr>
+          <p:cNvPr id="4" name="TextBox 3"/>
+          <p:cNvSpPr txBox="1"/>
+          <p:nvPr/>
+        </p:nvSpPr>
+        <p:spPr>
+          <a:xfrm>
+            <a:off x="640080" y="4128516"/>
+            <a:ext cx="10911535" cy="310896"/>
+          </a:xfrm>
+          <a:prstGeom prst="rect">
+            <a:avLst/>
+          </a:prstGeom>
+          <a:noFill/>
+        </p:spPr>
+        <p:txBody>
+          <a:bodyPr wrap="square">
+            <a:spAutoFit/>
+          </a:bodyPr>
+          <a:lstStyle/>
+          <a:p>
+            <a:pPr algn="ctr"/>
+            <a:r>
+              <a:rPr sz="2000" b="0" i="0">
+                <a:solidFill>
+                  <a:srgbClr val="828282"/>
+                </a:solidFill>
+                <a:latin typeface="Arial"/>
+              </a:rPr>
+              <a:t>ああ、ここに腕を開いて立っています</a:t>
+            </a:r>
+          </a:p>
+        </p:txBody>
+      </p:sp>
+      <p:sp>
+        <p:nvSpPr>
+          <p:cNvPr id="5" name="TextBox 4"/>
+          <p:cNvSpPr txBox="1"/>
+          <p:nvPr/>
+        </p:nvSpPr>
+        <p:spPr>
+          <a:xfrm>
+            <a:off x="640080" y="4494276"/>
+            <a:ext cx="10911535" cy="310896"/>
+          </a:xfrm>
+          <a:prstGeom prst="rect">
+            <a:avLst/>
+          </a:prstGeom>
+          <a:noFill/>
+        </p:spPr>
+        <p:txBody>
+          <a:bodyPr wrap="square">
+            <a:spAutoFit/>
+          </a:bodyPr>
+          <a:lstStyle/>
+          <a:p>
+            <a:pPr algn="ctr"/>
+            <a:r>
+              <a:rPr sz="2000" b="0" i="0">
+                <a:solidFill>
+                  <a:srgbClr val="828282"/>
+                </a:solidFill>
+                <a:latin typeface="Arial"/>
+              </a:rPr>
+              <a:t>ああ、私はあなたのもの、そしてあなたは私のもの、イエス</a:t>
             </a:r>
           </a:p>
         </p:txBody>
